--- a/Web-main.pptx
+++ b/Web-main.pptx
@@ -9,12 +9,14 @@
     <p:sldId id="257" r:id="rId3"/>
     <p:sldId id="263" r:id="rId4"/>
     <p:sldId id="265" r:id="rId5"/>
-    <p:sldId id="264" r:id="rId6"/>
-    <p:sldId id="266" r:id="rId7"/>
-    <p:sldId id="267" r:id="rId8"/>
-    <p:sldId id="268" r:id="rId9"/>
-    <p:sldId id="261" r:id="rId10"/>
-    <p:sldId id="262" r:id="rId11"/>
+    <p:sldId id="269" r:id="rId6"/>
+    <p:sldId id="270" r:id="rId7"/>
+    <p:sldId id="264" r:id="rId8"/>
+    <p:sldId id="266" r:id="rId9"/>
+    <p:sldId id="267" r:id="rId10"/>
+    <p:sldId id="268" r:id="rId11"/>
+    <p:sldId id="261" r:id="rId12"/>
+    <p:sldId id="262" r:id="rId13"/>
   </p:sldIdLst>
   <p:sldSz cx="12192000" cy="6858000"/>
   <p:notesSz cx="6858000" cy="9144000"/>
@@ -2409,23 +2411,11 @@
       <p:bgPr>
         <a:blipFill dpi="0" rotWithShape="1">
           <a:blip r:embed="rId13">
-            <a:alphaModFix amt="80000"/>
             <a:lum/>
-            <a:extLst>
-              <a:ext uri="{BEBA8EAE-BF5A-486C-A8C5-ECC9F3942E4B}">
-                <a14:imgProps xmlns:a14="http://schemas.microsoft.com/office/drawing/2010/main">
-                  <a14:imgLayer r:embed="rId14">
-                    <a14:imgEffect>
-                      <a14:artisticBlur radius="18"/>
-                    </a14:imgEffect>
-                  </a14:imgLayer>
-                </a14:imgProps>
-              </a:ext>
-            </a:extLst>
           </a:blip>
           <a:srcRect/>
           <a:stretch>
-            <a:fillRect t="-6000" b="-6000"/>
+            <a:fillRect/>
           </a:stretch>
         </a:blipFill>
         <a:effectLst/>
@@ -3001,31 +2991,36 @@
           <a:gradFill flip="none" rotWithShape="1">
             <a:gsLst>
               <a:gs pos="0">
-                <a:schemeClr val="accent3">
-                  <a:lumMod val="110000"/>
-                  <a:satMod val="105000"/>
-                  <a:tint val="67000"/>
+                <a:schemeClr val="accent1">
+                  <a:lumMod val="60000"/>
+                  <a:lumOff val="40000"/>
+                  <a:tint val="66000"/>
+                  <a:satMod val="160000"/>
                 </a:schemeClr>
               </a:gs>
               <a:gs pos="50000">
-                <a:schemeClr val="accent3">
-                  <a:lumMod val="105000"/>
-                  <a:satMod val="103000"/>
-                  <a:tint val="73000"/>
+                <a:schemeClr val="accent1">
+                  <a:lumMod val="60000"/>
+                  <a:lumOff val="40000"/>
+                  <a:tint val="44500"/>
+                  <a:satMod val="160000"/>
                 </a:schemeClr>
               </a:gs>
               <a:gs pos="100000">
-                <a:schemeClr val="accent3">
-                  <a:lumMod val="105000"/>
-                  <a:satMod val="109000"/>
-                  <a:tint val="81000"/>
+                <a:schemeClr val="accent1">
+                  <a:lumMod val="60000"/>
+                  <a:lumOff val="40000"/>
+                  <a:tint val="23500"/>
+                  <a:satMod val="160000"/>
                 </a:schemeClr>
               </a:gs>
             </a:gsLst>
-            <a:lin ang="13500000" scaled="1"/>
+            <a:lin ang="2700000" scaled="1"/>
             <a:tileRect/>
           </a:gradFill>
-          <a:ln/>
+          <a:ln>
+            <a:noFill/>
+          </a:ln>
         </p:spPr>
         <p:style>
           <a:lnRef idx="1">
@@ -3062,7 +3057,7 @@
         </p:nvSpPr>
         <p:spPr>
           <a:xfrm>
-            <a:off x="1800000" y="182404"/>
+            <a:off x="1800000" y="394160"/>
             <a:ext cx="8683108" cy="480131"/>
           </a:xfrm>
           <a:noFill/>
@@ -3129,20 +3124,52 @@
           <a:prstGeom prst="roundRect">
             <a:avLst/>
           </a:prstGeom>
-          <a:ln/>
+          <a:gradFill flip="none" rotWithShape="1">
+            <a:gsLst>
+              <a:gs pos="0">
+                <a:schemeClr val="accent1">
+                  <a:lumMod val="60000"/>
+                  <a:lumOff val="40000"/>
+                  <a:tint val="66000"/>
+                  <a:satMod val="160000"/>
+                </a:schemeClr>
+              </a:gs>
+              <a:gs pos="50000">
+                <a:schemeClr val="accent1">
+                  <a:lumMod val="60000"/>
+                  <a:lumOff val="40000"/>
+                  <a:tint val="44500"/>
+                  <a:satMod val="160000"/>
+                </a:schemeClr>
+              </a:gs>
+              <a:gs pos="100000">
+                <a:schemeClr val="accent1">
+                  <a:lumMod val="60000"/>
+                  <a:lumOff val="40000"/>
+                  <a:tint val="23500"/>
+                  <a:satMod val="160000"/>
+                </a:schemeClr>
+              </a:gs>
+            </a:gsLst>
+            <a:lin ang="13500000" scaled="1"/>
+            <a:tileRect/>
+          </a:gradFill>
+          <a:ln>
+            <a:noFill/>
+          </a:ln>
         </p:spPr>
         <p:style>
-          <a:lnRef idx="1">
-            <a:schemeClr val="accent3"/>
+          <a:lnRef idx="0">
+            <a:scrgbClr r="0" g="0" b="0"/>
           </a:lnRef>
-          <a:fillRef idx="2">
-            <a:schemeClr val="accent3"/>
+          <a:fillRef idx="0">
+            <a:scrgbClr r="0" g="0" b="0"/>
           </a:fillRef>
-          <a:effectRef idx="1">
-            <a:schemeClr val="accent3"/>
+          <a:effectRef idx="0">
+            <a:scrgbClr r="0" g="0" b="0"/>
           </a:effectRef>
           <a:fontRef idx="minor">
-            <a:schemeClr val="dk1"/>
+            <a:schemeClr val="lt1"/>
           </a:fontRef>
         </p:style>
         <p:txBody>
@@ -3275,241 +3302,10 @@
   <p:cSld>
     <p:spTree>
       <p:nvGrpSpPr>
-        <p:cNvPr id="1" name=""/>
-        <p:cNvGrpSpPr/>
-        <p:nvPr/>
-      </p:nvGrpSpPr>
-      <p:grpSpPr>
-        <a:xfrm>
-          <a:off x="0" y="0"/>
-          <a:ext cx="0" cy="0"/>
-          <a:chOff x="0" y="0"/>
-          <a:chExt cx="0" cy="0"/>
-        </a:xfrm>
-      </p:grpSpPr>
-      <p:sp>
-        <p:nvSpPr>
-          <p:cNvPr id="2" name="Заголовок 1"/>
-          <p:cNvSpPr>
-            <a:spLocks noGrp="1"/>
-          </p:cNvSpPr>
-          <p:nvPr>
-            <p:ph type="title"/>
-          </p:nvPr>
-        </p:nvSpPr>
-        <p:spPr>
-          <a:xfrm>
-            <a:off x="838200" y="499883"/>
-            <a:ext cx="9412857" cy="750497"/>
-          </a:xfrm>
-        </p:spPr>
-        <p:txBody>
-          <a:bodyPr>
-            <a:normAutofit/>
-          </a:bodyPr>
-          <a:lstStyle/>
-          <a:p>
-            <a:r>
-              <a:rPr lang="ru-RU" sz="2800" dirty="0">
-                <a:latin typeface="Times New Roman" panose="02020603050405020304" pitchFamily="18" charset="0"/>
-                <a:cs typeface="Times New Roman" panose="02020603050405020304" pitchFamily="18" charset="0"/>
-              </a:rPr>
-              <a:t>Выводы:</a:t>
-            </a:r>
-          </a:p>
-        </p:txBody>
-      </p:sp>
-      <p:sp>
-        <p:nvSpPr>
-          <p:cNvPr id="3" name="Объект 2"/>
-          <p:cNvSpPr>
-            <a:spLocks noGrp="1"/>
-          </p:cNvSpPr>
-          <p:nvPr>
-            <p:ph idx="1"/>
-          </p:nvPr>
-        </p:nvSpPr>
-        <p:spPr>
-          <a:xfrm>
-            <a:off x="838200" y="1597204"/>
-            <a:ext cx="10515600" cy="4351338"/>
-          </a:xfrm>
-        </p:spPr>
-        <p:txBody>
-          <a:bodyPr>
-            <a:normAutofit/>
-          </a:bodyPr>
-          <a:lstStyle/>
-          <a:p>
-            <a:r>
-              <a:rPr lang="ru-RU" sz="2200" dirty="0"/>
-              <a:t>Была успешно развёрнута </a:t>
-            </a:r>
-            <a:r>
-              <a:rPr lang="ru-RU" sz="2200" dirty="0" err="1"/>
-              <a:t>backend</a:t>
-            </a:r>
-            <a:r>
-              <a:rPr lang="ru-RU" sz="2200" dirty="0"/>
-              <a:t>-архитектура на </a:t>
-            </a:r>
-            <a:r>
-              <a:rPr lang="ru-RU" sz="2200" dirty="0" err="1"/>
-              <a:t>Flask</a:t>
-            </a:r>
-            <a:r>
-              <a:rPr lang="ru-RU" sz="2200" dirty="0"/>
-              <a:t> </a:t>
-            </a:r>
-            <a:r>
-              <a:rPr lang="ru-RU" sz="2200"/>
-              <a:t>и спроектирована база </a:t>
-            </a:r>
-            <a:r>
-              <a:rPr lang="ru-RU" sz="2200" dirty="0"/>
-              <a:t>данных.</a:t>
-            </a:r>
-          </a:p>
-          <a:p>
-            <a:r>
-              <a:rPr lang="ru-RU" sz="2200" dirty="0"/>
-              <a:t>Реализован полный спектр запланированных функций: от системы аутентификации и интеграции с внешним API до модулей игровых механик и личного кабинета.</a:t>
-            </a:r>
-          </a:p>
-          <a:p>
-            <a:r>
-              <a:rPr lang="ru-RU" sz="2200" dirty="0"/>
-              <a:t>Подтверждена эффективность выбранного набора технологий для создания сложных веб-приложений с интерактивными элементами.</a:t>
-            </a:r>
-          </a:p>
-          <a:p>
-            <a:r>
-              <a:rPr lang="ru-RU" sz="2200" dirty="0"/>
-              <a:t>Разработанный продукт представляет собой законченное, работоспособное решение, готовое к следующему этапу — публичному бета-тестированию и дальнейшему развитию.</a:t>
-            </a:r>
-          </a:p>
-          <a:p>
-            <a:endParaRPr lang="ru-RU" dirty="0"/>
-          </a:p>
-        </p:txBody>
-      </p:sp>
-    </p:spTree>
-    <p:extLst>
-      <p:ext uri="{BB962C8B-B14F-4D97-AF65-F5344CB8AC3E}">
-        <p14:creationId xmlns:p14="http://schemas.microsoft.com/office/powerpoint/2010/main" val="2020141601"/>
-      </p:ext>
-    </p:extLst>
-  </p:cSld>
-  <p:clrMapOvr>
-    <a:masterClrMapping/>
-  </p:clrMapOvr>
-</p:sld>
-</file>
-
-<file path=ppt/slides/slide2.xml><?xml version="1.0" encoding="utf-8"?>
-<p:sld xmlns:a="http://schemas.openxmlformats.org/drawingml/2006/main" xmlns:r="http://schemas.openxmlformats.org/officeDocument/2006/relationships" xmlns:p="http://schemas.openxmlformats.org/presentationml/2006/main">
-  <p:cSld>
-    <p:spTree>
-      <p:nvGrpSpPr>
-        <p:cNvPr id="1" name=""/>
-        <p:cNvGrpSpPr/>
-        <p:nvPr/>
-      </p:nvGrpSpPr>
-      <p:grpSpPr>
-        <a:xfrm>
-          <a:off x="0" y="0"/>
-          <a:ext cx="0" cy="0"/>
-          <a:chOff x="0" y="0"/>
-          <a:chExt cx="0" cy="0"/>
-        </a:xfrm>
-      </p:grpSpPr>
-      <p:sp>
-        <p:nvSpPr>
-          <p:cNvPr id="2" name="Заголовок 1"/>
-          <p:cNvSpPr>
-            <a:spLocks noGrp="1"/>
-          </p:cNvSpPr>
-          <p:nvPr>
-            <p:ph type="title"/>
-          </p:nvPr>
-        </p:nvSpPr>
-        <p:spPr>
-          <a:xfrm>
-            <a:off x="526351" y="790888"/>
-            <a:ext cx="10748374" cy="500332"/>
-          </a:xfrm>
-        </p:spPr>
-        <p:txBody>
-          <a:bodyPr>
-            <a:normAutofit/>
-          </a:bodyPr>
-          <a:lstStyle/>
-          <a:p>
-            <a:pPr algn="ctr"/>
-            <a:r>
-              <a:rPr lang="ru-RU" sz="2800" dirty="0">
-                <a:latin typeface="Times New Roman" panose="02020603050405020304" pitchFamily="18" charset="0"/>
-                <a:cs typeface="Times New Roman" panose="02020603050405020304" pitchFamily="18" charset="0"/>
-              </a:rPr>
-              <a:t>Цель:</a:t>
-            </a:r>
-          </a:p>
-        </p:txBody>
-      </p:sp>
-      <p:sp>
-        <p:nvSpPr>
-          <p:cNvPr id="4" name="Текст 3"/>
-          <p:cNvSpPr>
-            <a:spLocks noGrp="1"/>
-          </p:cNvSpPr>
-          <p:nvPr>
-            <p:ph type="body" sz="half" idx="2"/>
-          </p:nvPr>
-        </p:nvSpPr>
-        <p:spPr>
-          <a:xfrm>
-            <a:off x="1258787" y="1632247"/>
-            <a:ext cx="9714013" cy="4094607"/>
-          </a:xfrm>
-        </p:spPr>
-        <p:txBody>
-          <a:bodyPr>
-            <a:normAutofit/>
-          </a:bodyPr>
-          <a:lstStyle/>
-          <a:p>
-            <a:r>
-              <a:rPr lang="ru-RU" sz="2000" dirty="0">
-                <a:latin typeface="Times New Roman" panose="02020603050405020304" pitchFamily="18" charset="0"/>
-                <a:cs typeface="Times New Roman" panose="02020603050405020304" pitchFamily="18" charset="0"/>
-              </a:rPr>
-              <a:t>Разработка интерактивного веб-портала, предназначенного для болельщиков РФПЛ, с целью предоставления актуальной статистической информации и реализации набора интерактивных сервисов.</a:t>
-            </a:r>
-          </a:p>
-        </p:txBody>
-      </p:sp>
-    </p:spTree>
-    <p:extLst>
-      <p:ext uri="{BB962C8B-B14F-4D97-AF65-F5344CB8AC3E}">
-        <p14:creationId xmlns:p14="http://schemas.microsoft.com/office/powerpoint/2010/main" val="2501321342"/>
-      </p:ext>
-    </p:extLst>
-  </p:cSld>
-  <p:clrMapOvr>
-    <a:masterClrMapping/>
-  </p:clrMapOvr>
-</p:sld>
-</file>
-
-<file path=ppt/slides/slide3.xml><?xml version="1.0" encoding="utf-8"?>
-<p:sld xmlns:a="http://schemas.openxmlformats.org/drawingml/2006/main" xmlns:r="http://schemas.openxmlformats.org/officeDocument/2006/relationships" xmlns:p="http://schemas.openxmlformats.org/presentationml/2006/main">
-  <p:cSld>
-    <p:spTree>
-      <p:nvGrpSpPr>
         <p:cNvPr id="1" name="">
           <a:extLst>
             <a:ext uri="{FF2B5EF4-FFF2-40B4-BE49-F238E27FC236}">
-              <a16:creationId xmlns:a16="http://schemas.microsoft.com/office/drawing/2014/main" id="{38978688-9962-C26C-A69B-FEBFA37EE565}"/>
+              <a16:creationId xmlns:a16="http://schemas.microsoft.com/office/drawing/2014/main" id="{F625F576-7655-C5C5-B3F3-247F42A1A40F}"/>
             </a:ext>
           </a:extLst>
         </p:cNvPr>
@@ -3526,10 +3322,10 @@
       </p:grpSpPr>
       <p:sp>
         <p:nvSpPr>
-          <p:cNvPr id="2" name="Заголовок 1">
+          <p:cNvPr id="3" name="Объект 2">
             <a:extLst>
               <a:ext uri="{FF2B5EF4-FFF2-40B4-BE49-F238E27FC236}">
-                <a16:creationId xmlns:a16="http://schemas.microsoft.com/office/drawing/2014/main" id="{4584B5FB-C1C7-B686-2893-50895CFEA87F}"/>
+                <a16:creationId xmlns:a16="http://schemas.microsoft.com/office/drawing/2014/main" id="{94A670AD-09BC-1A01-1292-39458EBC6440}"/>
               </a:ext>
             </a:extLst>
           </p:cNvPr>
@@ -3537,310 +3333,13 @@
             <a:spLocks noGrp="1"/>
           </p:cNvSpPr>
           <p:nvPr>
-            <p:ph type="title"/>
+            <p:ph idx="1"/>
           </p:nvPr>
         </p:nvSpPr>
         <p:spPr>
           <a:xfrm>
-            <a:off x="526351" y="613723"/>
-            <a:ext cx="10748374" cy="500332"/>
-          </a:xfrm>
-        </p:spPr>
-        <p:txBody>
-          <a:bodyPr>
-            <a:normAutofit/>
-          </a:bodyPr>
-          <a:lstStyle/>
-          <a:p>
-            <a:r>
-              <a:rPr lang="ru-RU" sz="2800" dirty="0">
-                <a:latin typeface="Times New Roman" panose="02020603050405020304" pitchFamily="18" charset="0"/>
-                <a:cs typeface="Times New Roman" panose="02020603050405020304" pitchFamily="18" charset="0"/>
-              </a:rPr>
-              <a:t>Задачи:</a:t>
-            </a:r>
-          </a:p>
-        </p:txBody>
-      </p:sp>
-      <p:sp>
-        <p:nvSpPr>
-          <p:cNvPr id="4" name="Текст 3">
-            <a:extLst>
-              <a:ext uri="{FF2B5EF4-FFF2-40B4-BE49-F238E27FC236}">
-                <a16:creationId xmlns:a16="http://schemas.microsoft.com/office/drawing/2014/main" id="{4297316C-BF71-34E2-E0F9-09196637A76E}"/>
-              </a:ext>
-            </a:extLst>
-          </p:cNvPr>
-          <p:cNvSpPr>
-            <a:spLocks noGrp="1"/>
-          </p:cNvSpPr>
-          <p:nvPr>
-            <p:ph type="body" sz="half" idx="2"/>
-          </p:nvPr>
-        </p:nvSpPr>
-        <p:spPr>
-          <a:xfrm>
-            <a:off x="526351" y="1562884"/>
-            <a:ext cx="9700725" cy="4094607"/>
-          </a:xfrm>
-        </p:spPr>
-        <p:txBody>
-          <a:bodyPr>
-            <a:normAutofit fontScale="92500" lnSpcReduction="10000"/>
-          </a:bodyPr>
-          <a:lstStyle/>
-          <a:p>
-            <a:pPr marL="355600" indent="-355600">
-              <a:buFont typeface="+mj-lt"/>
-              <a:buAutoNum type="arabicPeriod"/>
-              <a:tabLst>
-                <a:tab pos="541338" algn="l"/>
-                <a:tab pos="630238" algn="l"/>
-              </a:tabLst>
-            </a:pPr>
-            <a:r>
-              <a:rPr lang="ru-RU" sz="2200" dirty="0">
-                <a:latin typeface="Times New Roman" panose="02020603050405020304" pitchFamily="18" charset="0"/>
-                <a:cs typeface="Times New Roman" panose="02020603050405020304" pitchFamily="18" charset="0"/>
-              </a:rPr>
-              <a:t>Разработать </a:t>
-            </a:r>
-            <a:r>
-              <a:rPr lang="ru-RU" sz="2200" dirty="0" err="1">
-                <a:latin typeface="Times New Roman" panose="02020603050405020304" pitchFamily="18" charset="0"/>
-                <a:cs typeface="Times New Roman" panose="02020603050405020304" pitchFamily="18" charset="0"/>
-              </a:rPr>
-              <a:t>backend</a:t>
-            </a:r>
-            <a:r>
-              <a:rPr lang="ru-RU" sz="2200" dirty="0">
-                <a:latin typeface="Times New Roman" panose="02020603050405020304" pitchFamily="18" charset="0"/>
-                <a:cs typeface="Times New Roman" panose="02020603050405020304" pitchFamily="18" charset="0"/>
-              </a:rPr>
-              <a:t> на </a:t>
-            </a:r>
-            <a:r>
-              <a:rPr lang="ru-RU" sz="2200" dirty="0" err="1">
-                <a:latin typeface="Times New Roman" panose="02020603050405020304" pitchFamily="18" charset="0"/>
-                <a:cs typeface="Times New Roman" panose="02020603050405020304" pitchFamily="18" charset="0"/>
-              </a:rPr>
-              <a:t>Flask</a:t>
-            </a:r>
-            <a:r>
-              <a:rPr lang="ru-RU" sz="2200" dirty="0">
-                <a:latin typeface="Times New Roman" panose="02020603050405020304" pitchFamily="18" charset="0"/>
-                <a:cs typeface="Times New Roman" panose="02020603050405020304" pitchFamily="18" charset="0"/>
-              </a:rPr>
-              <a:t> и спроектировать базу данных для хранения всей системной информации.</a:t>
-            </a:r>
-          </a:p>
-          <a:p>
-            <a:pPr marL="355600" indent="-355600">
-              <a:buFont typeface="+mj-lt"/>
-              <a:buAutoNum type="arabicPeriod"/>
-              <a:tabLst>
-                <a:tab pos="541338" algn="l"/>
-                <a:tab pos="630238" algn="l"/>
-              </a:tabLst>
-            </a:pPr>
-            <a:r>
-              <a:rPr lang="ru-RU" sz="2200" dirty="0">
-                <a:latin typeface="Times New Roman" panose="02020603050405020304" pitchFamily="18" charset="0"/>
-                <a:cs typeface="Times New Roman" panose="02020603050405020304" pitchFamily="18" charset="0"/>
-              </a:rPr>
-              <a:t>Реализовать систему безопасного входа и разделения прав пользователей.</a:t>
-            </a:r>
-          </a:p>
-          <a:p>
-            <a:pPr marL="355600" indent="-355600">
-              <a:buFont typeface="+mj-lt"/>
-              <a:buAutoNum type="arabicPeriod"/>
-              <a:tabLst>
-                <a:tab pos="541338" algn="l"/>
-                <a:tab pos="630238" algn="l"/>
-              </a:tabLst>
-            </a:pPr>
-            <a:r>
-              <a:rPr lang="ru-RU" sz="2200" dirty="0">
-                <a:latin typeface="Times New Roman" panose="02020603050405020304" pitchFamily="18" charset="0"/>
-                <a:cs typeface="Times New Roman" panose="02020603050405020304" pitchFamily="18" charset="0"/>
-              </a:rPr>
-              <a:t>Настроить автоматическое обновление спортивных данных через внешнее API.</a:t>
-            </a:r>
-          </a:p>
-          <a:p>
-            <a:pPr marL="355600" indent="-355600">
-              <a:buFont typeface="+mj-lt"/>
-              <a:buAutoNum type="arabicPeriod"/>
-              <a:tabLst>
-                <a:tab pos="541338" algn="l"/>
-                <a:tab pos="630238" algn="l"/>
-              </a:tabLst>
-            </a:pPr>
-            <a:r>
-              <a:rPr lang="ru-RU" sz="2200" dirty="0">
-                <a:latin typeface="Times New Roman" panose="02020603050405020304" pitchFamily="18" charset="0"/>
-                <a:cs typeface="Times New Roman" panose="02020603050405020304" pitchFamily="18" charset="0"/>
-              </a:rPr>
-              <a:t>Создать персонализированный профиль пользователя с возможностями кастомизации.</a:t>
-            </a:r>
-          </a:p>
-          <a:p>
-            <a:pPr marL="355600" indent="-355600">
-              <a:buFont typeface="+mj-lt"/>
-              <a:buAutoNum type="arabicPeriod"/>
-              <a:tabLst>
-                <a:tab pos="541338" algn="l"/>
-                <a:tab pos="630238" algn="l"/>
-              </a:tabLst>
-            </a:pPr>
-            <a:r>
-              <a:rPr lang="ru-RU" sz="2200" dirty="0">
-                <a:latin typeface="Times New Roman" panose="02020603050405020304" pitchFamily="18" charset="0"/>
-                <a:cs typeface="Times New Roman" panose="02020603050405020304" pitchFamily="18" charset="0"/>
-              </a:rPr>
-              <a:t>Внедрить три ключевых интерактивных модуля: Тесты, Ставки и систему Виртуального баланса.</a:t>
-            </a:r>
-          </a:p>
-          <a:p>
-            <a:pPr marL="355600" indent="-355600">
-              <a:buFont typeface="+mj-lt"/>
-              <a:buAutoNum type="arabicPeriod"/>
-              <a:tabLst>
-                <a:tab pos="541338" algn="l"/>
-                <a:tab pos="630238" algn="l"/>
-              </a:tabLst>
-            </a:pPr>
-            <a:r>
-              <a:rPr lang="ru-RU" sz="2200" dirty="0">
-                <a:latin typeface="Times New Roman" panose="02020603050405020304" pitchFamily="18" charset="0"/>
-                <a:cs typeface="Times New Roman" panose="02020603050405020304" pitchFamily="18" charset="0"/>
-              </a:rPr>
-              <a:t>Разработать инструменты администратора для управления платформой.</a:t>
-            </a:r>
-          </a:p>
-          <a:p>
-            <a:pPr marL="355600" indent="-355600">
-              <a:buFont typeface="+mj-lt"/>
-              <a:buAutoNum type="arabicPeriod"/>
-              <a:tabLst>
-                <a:tab pos="541338" algn="l"/>
-                <a:tab pos="630238" algn="l"/>
-              </a:tabLst>
-            </a:pPr>
-            <a:r>
-              <a:rPr lang="ru-RU" sz="2200" dirty="0">
-                <a:latin typeface="Times New Roman" panose="02020603050405020304" pitchFamily="18" charset="0"/>
-                <a:cs typeface="Times New Roman" panose="02020603050405020304" pitchFamily="18" charset="0"/>
-              </a:rPr>
-              <a:t>Провести тестирование работоспособности и удобства использования системы.</a:t>
-            </a:r>
-          </a:p>
-          <a:p>
-            <a:br>
-              <a:rPr lang="ru-RU" sz="2000" dirty="0"/>
-            </a:br>
-            <a:endParaRPr lang="ru-RU" sz="2000" dirty="0">
-              <a:latin typeface="Times New Roman" panose="02020603050405020304" pitchFamily="18" charset="0"/>
-              <a:cs typeface="Times New Roman" panose="02020603050405020304" pitchFamily="18" charset="0"/>
-            </a:endParaRPr>
-          </a:p>
-        </p:txBody>
-      </p:sp>
-    </p:spTree>
-    <p:extLst>
-      <p:ext uri="{BB962C8B-B14F-4D97-AF65-F5344CB8AC3E}">
-        <p14:creationId xmlns:p14="http://schemas.microsoft.com/office/powerpoint/2010/main" val="2661151610"/>
-      </p:ext>
-    </p:extLst>
-  </p:cSld>
-  <p:clrMapOvr>
-    <a:masterClrMapping/>
-  </p:clrMapOvr>
-</p:sld>
-</file>
-
-<file path=ppt/slides/slide4.xml><?xml version="1.0" encoding="utf-8"?>
-<p:sld xmlns:a="http://schemas.openxmlformats.org/drawingml/2006/main" xmlns:r="http://schemas.openxmlformats.org/officeDocument/2006/relationships" xmlns:p="http://schemas.openxmlformats.org/presentationml/2006/main">
-  <p:cSld>
-    <p:spTree>
-      <p:nvGrpSpPr>
-        <p:cNvPr id="1" name="">
-          <a:extLst>
-            <a:ext uri="{FF2B5EF4-FFF2-40B4-BE49-F238E27FC236}">
-              <a16:creationId xmlns:a16="http://schemas.microsoft.com/office/drawing/2014/main" id="{6D4BDCFE-5F04-2367-50D7-ACBEF5B5E8A5}"/>
-            </a:ext>
-          </a:extLst>
-        </p:cNvPr>
-        <p:cNvGrpSpPr/>
-        <p:nvPr/>
-      </p:nvGrpSpPr>
-      <p:grpSpPr>
-        <a:xfrm>
-          <a:off x="0" y="0"/>
-          <a:ext cx="0" cy="0"/>
-          <a:chOff x="0" y="0"/>
-          <a:chExt cx="0" cy="0"/>
-        </a:xfrm>
-      </p:grpSpPr>
-      <p:sp>
-        <p:nvSpPr>
-          <p:cNvPr id="2" name="Заголовок 1">
-            <a:extLst>
-              <a:ext uri="{FF2B5EF4-FFF2-40B4-BE49-F238E27FC236}">
-                <a16:creationId xmlns:a16="http://schemas.microsoft.com/office/drawing/2014/main" id="{863A8C8B-99FD-62CE-5877-9B50754197C4}"/>
-              </a:ext>
-            </a:extLst>
-          </p:cNvPr>
-          <p:cNvSpPr>
-            <a:spLocks noGrp="1"/>
-          </p:cNvSpPr>
-          <p:nvPr>
-            <p:ph type="title"/>
-          </p:nvPr>
-        </p:nvSpPr>
-        <p:spPr>
-          <a:xfrm>
-            <a:off x="343270" y="204388"/>
-            <a:ext cx="3964619" cy="480131"/>
-          </a:xfrm>
-        </p:spPr>
-        <p:txBody>
-          <a:bodyPr wrap="square">
-            <a:spAutoFit/>
-          </a:bodyPr>
-          <a:lstStyle/>
-          <a:p>
-            <a:r>
-              <a:rPr lang="ru-RU" sz="2800" dirty="0">
-                <a:latin typeface="Times New Roman" panose="02020603050405020304" pitchFamily="18" charset="0"/>
-                <a:cs typeface="Times New Roman" panose="02020603050405020304" pitchFamily="18" charset="0"/>
-              </a:rPr>
-              <a:t>Основной функционал:</a:t>
-            </a:r>
-          </a:p>
-        </p:txBody>
-      </p:sp>
-      <p:sp>
-        <p:nvSpPr>
-          <p:cNvPr id="3" name="Объект 2">
-            <a:extLst>
-              <a:ext uri="{FF2B5EF4-FFF2-40B4-BE49-F238E27FC236}">
-                <a16:creationId xmlns:a16="http://schemas.microsoft.com/office/drawing/2014/main" id="{0EDF6F45-4534-C7EA-7794-825E9B16EAE7}"/>
-              </a:ext>
-            </a:extLst>
-          </p:cNvPr>
-          <p:cNvSpPr>
-            <a:spLocks noGrp="1"/>
-          </p:cNvSpPr>
-          <p:nvPr>
-            <p:ph idx="1"/>
-          </p:nvPr>
-        </p:nvSpPr>
-        <p:spPr>
-          <a:xfrm>
-            <a:off x="343270" y="843524"/>
-            <a:ext cx="6371854" cy="2340746"/>
+            <a:off x="343270" y="214874"/>
+            <a:ext cx="6314705" cy="1671076"/>
           </a:xfrm>
         </p:spPr>
         <p:txBody>
@@ -3857,7 +3356,7 @@
                 <a:latin typeface="Times New Roman" panose="02020603050405020304" pitchFamily="18" charset="0"/>
                 <a:cs typeface="Times New Roman" panose="02020603050405020304" pitchFamily="18" charset="0"/>
               </a:rPr>
-              <a:t>Главная страница:</a:t>
+              <a:t>Турнирная таблица:</a:t>
             </a:r>
           </a:p>
           <a:p>
@@ -3866,7 +3365,7 @@
                 <a:latin typeface="Times New Roman" panose="02020603050405020304" pitchFamily="18" charset="0"/>
                 <a:cs typeface="Times New Roman" panose="02020603050405020304" pitchFamily="18" charset="0"/>
               </a:rPr>
-              <a:t>Турнирная таблица РПЛ с актуальными данными</a:t>
+              <a:t>Автоматическое обновление из внешнего API</a:t>
             </a:r>
           </a:p>
           <a:p>
@@ -3875,7 +3374,7 @@
                 <a:latin typeface="Times New Roman" panose="02020603050405020304" pitchFamily="18" charset="0"/>
                 <a:cs typeface="Times New Roman" panose="02020603050405020304" pitchFamily="18" charset="0"/>
               </a:rPr>
-              <a:t>Календарь матчей по турам с возможностью переключения</a:t>
+              <a:t>Визуальное выделение клуба пользователя</a:t>
             </a:r>
           </a:p>
           <a:p>
@@ -3884,22 +3383,17 @@
                 <a:latin typeface="Times New Roman" panose="02020603050405020304" pitchFamily="18" charset="0"/>
                 <a:cs typeface="Times New Roman" panose="02020603050405020304" pitchFamily="18" charset="0"/>
               </a:rPr>
-              <a:t>Информация о всех клубах РПЛ с картами стадионов</a:t>
-            </a:r>
-          </a:p>
-          <a:p>
-            <a:r>
-              <a:rPr lang="ru-RU" sz="2000" dirty="0">
-                <a:latin typeface="Times New Roman" panose="02020603050405020304" pitchFamily="18" charset="0"/>
-                <a:cs typeface="Times New Roman" panose="02020603050405020304" pitchFamily="18" charset="0"/>
-              </a:rPr>
-              <a:t>Автоматическое определение текущего тура</a:t>
+              <a:t>Полная статистика команд (игры, победы, голы, очки)</a:t>
             </a:r>
           </a:p>
           <a:p>
             <a:pPr marL="0" indent="0">
               <a:buNone/>
             </a:pPr>
+            <a:r>
+              <a:rPr lang="ru-RU" dirty="0"/>
+              <a:t/>
+            </a:r>
             <a:br>
               <a:rPr lang="ru-RU" dirty="0"/>
             </a:br>
@@ -3918,10 +3412,10 @@
       </p:sp>
       <p:pic>
         <p:nvPicPr>
-          <p:cNvPr id="5" name="Рисунок 4" descr="Изображение выглядит как текст, снимок экрана, программное обеспечение, Шрифт&#10;&#10;Содержимое, созданное искусственным интеллектом, может быть неверным.">
+          <p:cNvPr id="5" name="Рисунок 4" descr="Изображение выглядит как текст, снимок экрана, число, Параллельный&#10;&#10;Содержимое, созданное искусственным интеллектом, может быть неверным.">
             <a:extLst>
               <a:ext uri="{FF2B5EF4-FFF2-40B4-BE49-F238E27FC236}">
-                <a16:creationId xmlns:a16="http://schemas.microsoft.com/office/drawing/2014/main" id="{1C24AB26-9F4E-5FDC-7866-EA6644AD8D95}"/>
+                <a16:creationId xmlns:a16="http://schemas.microsoft.com/office/drawing/2014/main" id="{7BA57F0E-BFE5-F688-BFFB-B930800DB19A}"/>
               </a:ext>
             </a:extLst>
           </p:cNvPr>
@@ -3938,8 +3432,8 @@
         </p:blipFill>
         <p:spPr>
           <a:xfrm>
-            <a:off x="343270" y="3343275"/>
-            <a:ext cx="4960073" cy="3086497"/>
+            <a:off x="343270" y="1977589"/>
+            <a:ext cx="6314705" cy="4665537"/>
           </a:xfrm>
           <a:prstGeom prst="rect">
             <a:avLst/>
@@ -3948,10 +3442,10 @@
       </p:pic>
       <p:pic>
         <p:nvPicPr>
-          <p:cNvPr id="9" name="Рисунок 8" descr="Изображение выглядит как текст, Шрифт, линия, снимок экрана&#10;&#10;Содержимое, созданное искусственным интеллектом, может быть неверным.">
+          <p:cNvPr id="8" name="Рисунок 7" descr="Изображение выглядит как текст, снимок экрана, Шрифт, логотип&#10;&#10;Содержимое, созданное искусственным интеллектом, может быть неверным.">
             <a:extLst>
               <a:ext uri="{FF2B5EF4-FFF2-40B4-BE49-F238E27FC236}">
-                <a16:creationId xmlns:a16="http://schemas.microsoft.com/office/drawing/2014/main" id="{3F7D42EF-4F51-DC31-C014-4B533EDFD775}"/>
+                <a16:creationId xmlns:a16="http://schemas.microsoft.com/office/drawing/2014/main" id="{54E7535B-E38A-7B81-C641-073D7C325456}"/>
               </a:ext>
             </a:extLst>
           </p:cNvPr>
@@ -3968,8 +3462,8 @@
         </p:blipFill>
         <p:spPr>
           <a:xfrm>
-            <a:off x="5438150" y="4164944"/>
-            <a:ext cx="6581196" cy="1443158"/>
+            <a:off x="6866612" y="2971799"/>
+            <a:ext cx="4982118" cy="3095625"/>
           </a:xfrm>
           <a:prstGeom prst="rect">
             <a:avLst/>
@@ -3978,10 +3472,10 @@
       </p:pic>
       <p:sp>
         <p:nvSpPr>
-          <p:cNvPr id="10" name="Объект 2">
+          <p:cNvPr id="9" name="Объект 2">
             <a:extLst>
               <a:ext uri="{FF2B5EF4-FFF2-40B4-BE49-F238E27FC236}">
-                <a16:creationId xmlns:a16="http://schemas.microsoft.com/office/drawing/2014/main" id="{396E3625-7885-53F6-B32C-74476FF84DE1}"/>
+                <a16:creationId xmlns:a16="http://schemas.microsoft.com/office/drawing/2014/main" id="{11CB7C3D-A337-B45F-14D1-FBF61FE93CCB}"/>
               </a:ext>
             </a:extLst>
           </p:cNvPr>
@@ -3992,13 +3486,12 @@
         </p:nvSpPr>
         <p:spPr>
           <a:xfrm>
-            <a:off x="6715124" y="684519"/>
-            <a:ext cx="5304222" cy="3086496"/>
+            <a:off x="6866613" y="306513"/>
+            <a:ext cx="4982117" cy="2255712"/>
           </a:xfrm>
           <a:prstGeom prst="rect">
             <a:avLst/>
           </a:prstGeom>
-          <a:noFill/>
         </p:spPr>
         <p:txBody>
           <a:bodyPr vert="horz" lIns="91440" tIns="45720" rIns="91440" bIns="45720" rtlCol="0">
@@ -4177,7 +3670,7 @@
                 <a:latin typeface="Times New Roman" panose="02020603050405020304" pitchFamily="18" charset="0"/>
                 <a:cs typeface="Times New Roman" panose="02020603050405020304" pitchFamily="18" charset="0"/>
               </a:rPr>
-              <a:t>Система ставок:</a:t>
+              <a:t>Тесты на знание РПЛ:</a:t>
             </a:r>
           </a:p>
           <a:p>
@@ -4186,7 +3679,7 @@
                 <a:latin typeface="Times New Roman" panose="02020603050405020304" pitchFamily="18" charset="0"/>
                 <a:cs typeface="Times New Roman" panose="02020603050405020304" pitchFamily="18" charset="0"/>
               </a:rPr>
-              <a:t>Ставки на предстоящие матчи с виртуальной валютой</a:t>
+              <a:t>Три уровня сложности: легкий, средний, сложный</a:t>
             </a:r>
           </a:p>
           <a:p>
@@ -4195,7 +3688,7 @@
                 <a:latin typeface="Times New Roman" panose="02020603050405020304" pitchFamily="18" charset="0"/>
                 <a:cs typeface="Times New Roman" panose="02020603050405020304" pitchFamily="18" charset="0"/>
               </a:rPr>
-              <a:t>Три варианта исхода: победа хозяев, ничья, победа гостей</a:t>
+              <a:t>10 вопросов в каждом тесте</a:t>
             </a:r>
           </a:p>
           <a:p>
@@ -4204,7 +3697,7 @@
                 <a:latin typeface="Times New Roman" panose="02020603050405020304" pitchFamily="18" charset="0"/>
                 <a:cs typeface="Times New Roman" panose="02020603050405020304" pitchFamily="18" charset="0"/>
               </a:rPr>
-              <a:t>Автоматический расчет результатов после матчей</a:t>
+              <a:t>Награда монетами за правильные ответы</a:t>
             </a:r>
           </a:p>
           <a:p>
@@ -4213,15 +3706,39 @@
                 <a:latin typeface="Times New Roman" panose="02020603050405020304" pitchFamily="18" charset="0"/>
                 <a:cs typeface="Times New Roman" panose="02020603050405020304" pitchFamily="18" charset="0"/>
               </a:rPr>
-              <a:t>Удвоение выигрыша при правильном прогнозе</a:t>
-            </a:r>
+              <a:t>Подробный разбор результатов</a:t>
+            </a:r>
+          </a:p>
+          <a:p>
+            <a:pPr marL="0" indent="0">
+              <a:buFont typeface="Arial" panose="020B0604020202020204" pitchFamily="34" charset="0"/>
+              <a:buNone/>
+            </a:pPr>
+            <a:r>
+              <a:rPr lang="ru-RU" dirty="0"/>
+              <a:t/>
+            </a:r>
+            <a:br>
+              <a:rPr lang="ru-RU" dirty="0"/>
+            </a:br>
+            <a:endParaRPr lang="ru-RU" sz="2400" dirty="0">
+              <a:latin typeface="Times New Roman" panose="02020603050405020304" pitchFamily="18" charset="0"/>
+              <a:cs typeface="Times New Roman" panose="02020603050405020304" pitchFamily="18" charset="0"/>
+            </a:endParaRPr>
+          </a:p>
+          <a:p>
+            <a:pPr marL="0" indent="0">
+              <a:buFont typeface="Arial" panose="020B0604020202020204" pitchFamily="34" charset="0"/>
+              <a:buNone/>
+            </a:pPr>
+            <a:endParaRPr lang="ru-RU" sz="2400" dirty="0"/>
           </a:p>
         </p:txBody>
       </p:sp>
     </p:spTree>
     <p:extLst>
       <p:ext uri="{BB962C8B-B14F-4D97-AF65-F5344CB8AC3E}">
-        <p14:creationId xmlns:p14="http://schemas.microsoft.com/office/powerpoint/2010/main" val="1832056001"/>
+        <p14:creationId xmlns:p14="http://schemas.microsoft.com/office/powerpoint/2010/main" val="4072055489"/>
       </p:ext>
     </p:extLst>
   </p:cSld>
@@ -4231,7 +3748,7 @@
 </p:sld>
 </file>
 
-<file path=ppt/slides/slide5.xml><?xml version="1.0" encoding="utf-8"?>
+<file path=ppt/slides/slide11.xml><?xml version="1.0" encoding="utf-8"?>
 <p:sld xmlns:a="http://schemas.openxmlformats.org/drawingml/2006/main" xmlns:r="http://schemas.openxmlformats.org/officeDocument/2006/relationships" xmlns:p="http://schemas.openxmlformats.org/presentationml/2006/main">
   <p:cSld>
     <p:spTree>
@@ -4250,24 +3767,62 @@
       </p:grpSpPr>
       <p:sp>
         <p:nvSpPr>
-          <p:cNvPr id="3" name="Объект 2">
-            <a:extLst>
-              <a:ext uri="{FF2B5EF4-FFF2-40B4-BE49-F238E27FC236}">
-                <a16:creationId xmlns:a16="http://schemas.microsoft.com/office/drawing/2014/main" id="{2132F70D-E589-1B4B-F5D0-53D58257C847}"/>
-              </a:ext>
-            </a:extLst>
-          </p:cNvPr>
-          <p:cNvSpPr>
-            <a:spLocks noGrp="1"/>
-          </p:cNvSpPr>
-          <p:nvPr>
-            <p:ph idx="1"/>
+          <p:cNvPr id="2" name="Заголовок 1"/>
+          <p:cNvSpPr>
+            <a:spLocks noGrp="1"/>
+          </p:cNvSpPr>
+          <p:nvPr>
+            <p:ph type="title"/>
           </p:nvPr>
         </p:nvSpPr>
         <p:spPr>
           <a:xfrm>
-            <a:off x="346229" y="222787"/>
-            <a:ext cx="6064096" cy="1988597"/>
+            <a:off x="838200" y="231914"/>
+            <a:ext cx="10515600" cy="521681"/>
+          </a:xfrm>
+        </p:spPr>
+        <p:txBody>
+          <a:bodyPr>
+            <a:spAutoFit/>
+          </a:bodyPr>
+          <a:lstStyle/>
+          <a:p>
+            <a:pPr algn="ctr"/>
+            <a:r>
+              <a:rPr lang="ru-RU" sz="2800" dirty="0">
+                <a:latin typeface="Times New Roman" panose="02020603050405020304" pitchFamily="18" charset="0"/>
+                <a:cs typeface="Times New Roman" panose="02020603050405020304" pitchFamily="18" charset="0"/>
+              </a:rPr>
+              <a:t>Уникальные отличия нашего фан-сайта от конкурентов</a:t>
+            </a:r>
+            <a:r>
+              <a:rPr lang="ru-RU" sz="3100" dirty="0">
+                <a:latin typeface="Times New Roman" panose="02020603050405020304" pitchFamily="18" charset="0"/>
+                <a:cs typeface="Times New Roman" panose="02020603050405020304" pitchFamily="18" charset="0"/>
+              </a:rPr>
+              <a:t>:</a:t>
+            </a:r>
+            <a:endParaRPr lang="ru-RU" sz="2800" dirty="0">
+              <a:latin typeface="Times New Roman" panose="02020603050405020304" pitchFamily="18" charset="0"/>
+              <a:cs typeface="Times New Roman" panose="02020603050405020304" pitchFamily="18" charset="0"/>
+            </a:endParaRPr>
+          </a:p>
+        </p:txBody>
+      </p:sp>
+      <p:sp>
+        <p:nvSpPr>
+          <p:cNvPr id="3" name="Объект 2"/>
+          <p:cNvSpPr>
+            <a:spLocks noGrp="1"/>
+          </p:cNvSpPr>
+          <p:nvPr>
+            <p:ph idx="1"/>
+          </p:nvPr>
+        </p:nvSpPr>
+        <p:spPr>
+          <a:xfrm>
+            <a:off x="838199" y="1164341"/>
+            <a:ext cx="10515599" cy="4529318"/>
           </a:xfrm>
         </p:spPr>
         <p:txBody>
@@ -4284,7 +3839,7 @@
                 <a:latin typeface="Times New Roman" panose="02020603050405020304" pitchFamily="18" charset="0"/>
                 <a:cs typeface="Times New Roman" panose="02020603050405020304" pitchFamily="18" charset="0"/>
               </a:rPr>
-              <a:t>Регистрация и авторизация:</a:t>
+              <a:t>1. Игровой подход:</a:t>
             </a:r>
           </a:p>
           <a:p>
@@ -4293,7 +3848,7 @@
                 <a:latin typeface="Times New Roman" panose="02020603050405020304" pitchFamily="18" charset="0"/>
                 <a:cs typeface="Times New Roman" panose="02020603050405020304" pitchFamily="18" charset="0"/>
               </a:rPr>
-              <a:t>Регистрация с выбором любимого клуба</a:t>
+              <a:t>Полноценная экономика с виртуальной валютой, магазином и системой заработка</a:t>
             </a:r>
           </a:p>
           <a:p>
@@ -4302,181 +3857,102 @@
                 <a:latin typeface="Times New Roman" panose="02020603050405020304" pitchFamily="18" charset="0"/>
                 <a:cs typeface="Times New Roman" panose="02020603050405020304" pitchFamily="18" charset="0"/>
               </a:rPr>
-              <a:t>Вход для зарегистрированных пользователей</a:t>
+              <a:t>Три уровня тестов (легкий/средний/сложный) с разными наградами — аналог игровых "уровней сложности"</a:t>
+            </a:r>
+          </a:p>
+          <a:p>
+            <a:r>
+              <a:rPr lang="ru-RU" sz="2000" dirty="0">
+                <a:latin typeface="Times New Roman" panose="02020603050405020304" pitchFamily="18" charset="0"/>
+                <a:cs typeface="Times New Roman" panose="02020603050405020304" pitchFamily="18" charset="0"/>
+              </a:rPr>
+              <a:t>Колесо удачи с ежедневными наградами — механика из мобильных игр</a:t>
             </a:r>
           </a:p>
           <a:p>
             <a:pPr marL="0" indent="0">
               <a:buNone/>
             </a:pPr>
-            <a:endParaRPr lang="ru-RU" sz="2400" dirty="0">
-              <a:latin typeface="Times New Roman" panose="02020603050405020304" pitchFamily="18" charset="0"/>
-              <a:cs typeface="Times New Roman" panose="02020603050405020304" pitchFamily="18" charset="0"/>
-            </a:endParaRPr>
-          </a:p>
-          <a:p>
-            <a:pPr marL="0" indent="0">
-              <a:buNone/>
-            </a:pPr>
-            <a:endParaRPr lang="ru-RU" sz="2400" dirty="0"/>
-          </a:p>
-        </p:txBody>
-      </p:sp>
-      <p:pic>
-        <p:nvPicPr>
-          <p:cNvPr id="15" name="Рисунок 14" descr="Изображение выглядит как текст, снимок экрана, программное обеспечение, веб-страница&#10;&#10;Содержимое, созданное искусственным интеллектом, может быть неверным.">
-            <a:extLst>
-              <a:ext uri="{FF2B5EF4-FFF2-40B4-BE49-F238E27FC236}">
-                <a16:creationId xmlns:a16="http://schemas.microsoft.com/office/drawing/2014/main" id="{E80D3096-B529-E527-97C5-BBBC20578DDA}"/>
-              </a:ext>
-            </a:extLst>
-          </p:cNvPr>
-          <p:cNvPicPr>
-            <a:picLocks noChangeAspect="1"/>
-          </p:cNvPicPr>
-          <p:nvPr/>
-        </p:nvPicPr>
-        <p:blipFill>
-          <a:blip r:embed="rId2"/>
-          <a:stretch>
-            <a:fillRect/>
-          </a:stretch>
-        </p:blipFill>
-        <p:spPr>
-          <a:xfrm>
-            <a:off x="343270" y="2661438"/>
-            <a:ext cx="6067055" cy="3338004"/>
-          </a:xfrm>
-          <a:prstGeom prst="rect">
-            <a:avLst/>
-          </a:prstGeom>
-        </p:spPr>
-      </p:pic>
-      <p:pic>
-        <p:nvPicPr>
-          <p:cNvPr id="19" name="Рисунок 18" descr="Изображение выглядит как текст, снимок экрана, диаграмма, круг&#10;&#10;Содержимое, созданное искусственным интеллектом, может быть неверным.">
-            <a:extLst>
-              <a:ext uri="{FF2B5EF4-FFF2-40B4-BE49-F238E27FC236}">
-                <a16:creationId xmlns:a16="http://schemas.microsoft.com/office/drawing/2014/main" id="{54E103FC-904C-A272-89EA-983E44EE02AC}"/>
-              </a:ext>
-            </a:extLst>
-          </p:cNvPr>
-          <p:cNvPicPr>
-            <a:picLocks noChangeAspect="1"/>
-          </p:cNvPicPr>
-          <p:nvPr/>
-        </p:nvPicPr>
-        <p:blipFill>
-          <a:blip r:embed="rId3"/>
-          <a:stretch>
-            <a:fillRect/>
-          </a:stretch>
-        </p:blipFill>
-        <p:spPr>
-          <a:xfrm>
-            <a:off x="6951374" y="2661438"/>
-            <a:ext cx="3097501" cy="3338004"/>
-          </a:xfrm>
-          <a:prstGeom prst="rect">
-            <a:avLst/>
-          </a:prstGeom>
-          <a:noFill/>
-        </p:spPr>
-      </p:pic>
-      <p:sp>
-        <p:nvSpPr>
-          <p:cNvPr id="20" name="TextBox 19">
-            <a:extLst>
-              <a:ext uri="{FF2B5EF4-FFF2-40B4-BE49-F238E27FC236}">
-                <a16:creationId xmlns:a16="http://schemas.microsoft.com/office/drawing/2014/main" id="{B407F7F1-A132-A65F-4072-BD6A420998FC}"/>
-              </a:ext>
-            </a:extLst>
-          </p:cNvPr>
-          <p:cNvSpPr txBox="1"/>
-          <p:nvPr/>
-        </p:nvSpPr>
-        <p:spPr>
-          <a:xfrm>
-            <a:off x="6951374" y="222787"/>
-            <a:ext cx="5193001" cy="1988597"/>
-          </a:xfrm>
-          <a:prstGeom prst="rect">
-            <a:avLst/>
-          </a:prstGeom>
-          <a:noFill/>
-        </p:spPr>
-        <p:txBody>
-          <a:bodyPr wrap="square" rtlCol="0">
-            <a:normAutofit/>
-          </a:bodyPr>
-          <a:lstStyle/>
-          <a:p>
-            <a:r>
-              <a:rPr lang="ru-RU" sz="2400" dirty="0">
-                <a:latin typeface="Times New Roman" panose="02020603050405020304" pitchFamily="18" charset="0"/>
-                <a:cs typeface="Times New Roman" panose="02020603050405020304" pitchFamily="18" charset="0"/>
-              </a:rPr>
-              <a:t>Колесо удачи:</a:t>
-            </a:r>
-          </a:p>
-          <a:p>
-            <a:pPr marL="285750" indent="-285750">
-              <a:buFont typeface="Arial" panose="020B0604020202020204" pitchFamily="34" charset="0"/>
-              <a:buChar char="•"/>
-            </a:pPr>
-            <a:r>
-              <a:rPr lang="ru-RU" dirty="0"/>
-              <a:t>Ежедневная возможность вращения (раз в 24 часа)</a:t>
-            </a:r>
-          </a:p>
-          <a:p>
-            <a:pPr marL="285750" indent="-285750">
-              <a:buFont typeface="Arial" panose="020B0604020202020204" pitchFamily="34" charset="0"/>
-              <a:buChar char="•"/>
-            </a:pPr>
-            <a:r>
-              <a:rPr lang="ru-RU" dirty="0"/>
-              <a:t>10 секторов с разными призами/штрафами</a:t>
-            </a:r>
-          </a:p>
-          <a:p>
-            <a:pPr marL="285750" indent="-285750">
-              <a:buFont typeface="Arial" panose="020B0604020202020204" pitchFamily="34" charset="0"/>
-              <a:buChar char="•"/>
-            </a:pPr>
-            <a:r>
-              <a:rPr lang="ru-RU" dirty="0"/>
-              <a:t>Анимация вращения и визуальные эффекты</a:t>
-            </a:r>
-          </a:p>
-          <a:p>
-            <a:pPr marL="285750" indent="-285750">
-              <a:buFont typeface="Arial" panose="020B0604020202020204" pitchFamily="34" charset="0"/>
-              <a:buChar char="•"/>
-            </a:pPr>
-            <a:r>
-              <a:rPr lang="ru-RU" dirty="0"/>
-              <a:t>Система вероятностей для разных призов</a:t>
-            </a:r>
-          </a:p>
-          <a:p>
             <a:endParaRPr lang="ru-RU" sz="2000" dirty="0">
               <a:latin typeface="Times New Roman" panose="02020603050405020304" pitchFamily="18" charset="0"/>
               <a:cs typeface="Times New Roman" panose="02020603050405020304" pitchFamily="18" charset="0"/>
             </a:endParaRPr>
           </a:p>
           <a:p>
-            <a:endParaRPr lang="ru-RU" sz="2400" dirty="0">
+            <a:pPr marL="0" indent="0">
+              <a:buNone/>
+            </a:pPr>
+            <a:r>
+              <a:rPr lang="ru-RU" sz="2400" dirty="0">
+                <a:latin typeface="Times New Roman" panose="02020603050405020304" pitchFamily="18" charset="0"/>
+                <a:cs typeface="Times New Roman" panose="02020603050405020304" pitchFamily="18" charset="0"/>
+              </a:rPr>
+              <a:t>2. Продвинутая система персонализации:</a:t>
+            </a:r>
+          </a:p>
+          <a:p>
+            <a:r>
+              <a:rPr lang="ru-RU" sz="2000" dirty="0">
+                <a:latin typeface="Times New Roman" panose="02020603050405020304" pitchFamily="18" charset="0"/>
+                <a:cs typeface="Times New Roman" panose="02020603050405020304" pitchFamily="18" charset="0"/>
+              </a:rPr>
+              <a:t>8 кастомизируемых тем (индиго, закат, лес и т.д.)</a:t>
+            </a:r>
+          </a:p>
+          <a:p>
+            <a:r>
+              <a:rPr lang="ru-RU" sz="2000" dirty="0">
+                <a:latin typeface="Times New Roman" panose="02020603050405020304" pitchFamily="18" charset="0"/>
+                <a:cs typeface="Times New Roman" panose="02020603050405020304" pitchFamily="18" charset="0"/>
+              </a:rPr>
+              <a:t>Клубная тема оформления с автоматическим применением цветов команды</a:t>
+            </a:r>
+          </a:p>
+          <a:p>
+            <a:r>
+              <a:rPr lang="ru-RU" sz="2000" dirty="0">
+                <a:latin typeface="Times New Roman" panose="02020603050405020304" pitchFamily="18" charset="0"/>
+                <a:cs typeface="Times New Roman" panose="02020603050405020304" pitchFamily="18" charset="0"/>
+              </a:rPr>
+              <a:t>Интерактивный предпросмотр тем и рамок при наведении</a:t>
+            </a:r>
+          </a:p>
+          <a:p>
+            <a:pPr marL="0" indent="0">
+              <a:buNone/>
+            </a:pPr>
+            <a:endParaRPr lang="ru-RU" sz="2000" dirty="0">
               <a:latin typeface="Times New Roman" panose="02020603050405020304" pitchFamily="18" charset="0"/>
               <a:cs typeface="Times New Roman" panose="02020603050405020304" pitchFamily="18" charset="0"/>
             </a:endParaRPr>
           </a:p>
+          <a:p>
+            <a:endParaRPr lang="ru-RU" sz="2000" dirty="0">
+              <a:latin typeface="Times New Roman" panose="02020603050405020304" pitchFamily="18" charset="0"/>
+              <a:cs typeface="Times New Roman" panose="02020603050405020304" pitchFamily="18" charset="0"/>
+            </a:endParaRPr>
+          </a:p>
+          <a:p>
+            <a:endParaRPr lang="ru-RU" sz="2000" dirty="0">
+              <a:latin typeface="Times New Roman" panose="02020603050405020304" pitchFamily="18" charset="0"/>
+              <a:cs typeface="Times New Roman" panose="02020603050405020304" pitchFamily="18" charset="0"/>
+            </a:endParaRPr>
+          </a:p>
+          <a:p>
+            <a:endParaRPr lang="ru-RU" sz="2000" dirty="0">
+              <a:latin typeface="Times New Roman" panose="02020603050405020304" pitchFamily="18" charset="0"/>
+              <a:cs typeface="Times New Roman" panose="02020603050405020304" pitchFamily="18" charset="0"/>
+            </a:endParaRPr>
+          </a:p>
+          <a:p>
+            <a:endParaRPr lang="ru-RU" dirty="0"/>
+          </a:p>
         </p:txBody>
       </p:sp>
     </p:spTree>
     <p:extLst>
       <p:ext uri="{BB962C8B-B14F-4D97-AF65-F5344CB8AC3E}">
-        <p14:creationId xmlns:p14="http://schemas.microsoft.com/office/powerpoint/2010/main" val="1654919368"/>
+        <p14:creationId xmlns:p14="http://schemas.microsoft.com/office/powerpoint/2010/main" val="3944365689"/>
       </p:ext>
     </p:extLst>
   </p:cSld>
@@ -4486,7 +3962,238 @@
 </p:sld>
 </file>
 
-<file path=ppt/slides/slide6.xml><?xml version="1.0" encoding="utf-8"?>
+<file path=ppt/slides/slide12.xml><?xml version="1.0" encoding="utf-8"?>
+<p:sld xmlns:a="http://schemas.openxmlformats.org/drawingml/2006/main" xmlns:r="http://schemas.openxmlformats.org/officeDocument/2006/relationships" xmlns:p="http://schemas.openxmlformats.org/presentationml/2006/main">
+  <p:cSld>
+    <p:spTree>
+      <p:nvGrpSpPr>
+        <p:cNvPr id="1" name=""/>
+        <p:cNvGrpSpPr/>
+        <p:nvPr/>
+      </p:nvGrpSpPr>
+      <p:grpSpPr>
+        <a:xfrm>
+          <a:off x="0" y="0"/>
+          <a:ext cx="0" cy="0"/>
+          <a:chOff x="0" y="0"/>
+          <a:chExt cx="0" cy="0"/>
+        </a:xfrm>
+      </p:grpSpPr>
+      <p:sp>
+        <p:nvSpPr>
+          <p:cNvPr id="2" name="Заголовок 1"/>
+          <p:cNvSpPr>
+            <a:spLocks noGrp="1"/>
+          </p:cNvSpPr>
+          <p:nvPr>
+            <p:ph type="title"/>
+          </p:nvPr>
+        </p:nvSpPr>
+        <p:spPr>
+          <a:xfrm>
+            <a:off x="838200" y="499883"/>
+            <a:ext cx="9412857" cy="750497"/>
+          </a:xfrm>
+        </p:spPr>
+        <p:txBody>
+          <a:bodyPr>
+            <a:normAutofit/>
+          </a:bodyPr>
+          <a:lstStyle/>
+          <a:p>
+            <a:r>
+              <a:rPr lang="ru-RU" sz="2800" dirty="0">
+                <a:latin typeface="Times New Roman" panose="02020603050405020304" pitchFamily="18" charset="0"/>
+                <a:cs typeface="Times New Roman" panose="02020603050405020304" pitchFamily="18" charset="0"/>
+              </a:rPr>
+              <a:t>Выводы:</a:t>
+            </a:r>
+          </a:p>
+        </p:txBody>
+      </p:sp>
+      <p:sp>
+        <p:nvSpPr>
+          <p:cNvPr id="3" name="Объект 2"/>
+          <p:cNvSpPr>
+            <a:spLocks noGrp="1"/>
+          </p:cNvSpPr>
+          <p:nvPr>
+            <p:ph idx="1"/>
+          </p:nvPr>
+        </p:nvSpPr>
+        <p:spPr>
+          <a:xfrm>
+            <a:off x="838200" y="1597204"/>
+            <a:ext cx="10515600" cy="4351338"/>
+          </a:xfrm>
+        </p:spPr>
+        <p:txBody>
+          <a:bodyPr>
+            <a:normAutofit/>
+          </a:bodyPr>
+          <a:lstStyle/>
+          <a:p>
+            <a:r>
+              <a:rPr lang="ru-RU" sz="2200" dirty="0"/>
+              <a:t>Была успешно развёрнута </a:t>
+            </a:r>
+            <a:r>
+              <a:rPr lang="ru-RU" sz="2200" dirty="0" err="1"/>
+              <a:t>backend</a:t>
+            </a:r>
+            <a:r>
+              <a:rPr lang="ru-RU" sz="2200" dirty="0"/>
+              <a:t>-архитектура на </a:t>
+            </a:r>
+            <a:r>
+              <a:rPr lang="ru-RU" sz="2200" dirty="0" err="1"/>
+              <a:t>Flask</a:t>
+            </a:r>
+            <a:r>
+              <a:rPr lang="ru-RU" sz="2200" dirty="0"/>
+              <a:t> </a:t>
+            </a:r>
+            <a:r>
+              <a:rPr lang="ru-RU" sz="2200"/>
+              <a:t>и спроектирована база </a:t>
+            </a:r>
+            <a:r>
+              <a:rPr lang="ru-RU" sz="2200" dirty="0"/>
+              <a:t>данных.</a:t>
+            </a:r>
+          </a:p>
+          <a:p>
+            <a:r>
+              <a:rPr lang="ru-RU" sz="2200" dirty="0"/>
+              <a:t>Реализован полный спектр запланированных функций: от системы аутентификации и интеграции с внешним API до модулей игровых механик и личного кабинета.</a:t>
+            </a:r>
+          </a:p>
+          <a:p>
+            <a:r>
+              <a:rPr lang="ru-RU" sz="2200" dirty="0"/>
+              <a:t>Подтверждена эффективность выбранного набора технологий для создания сложных веб-приложений с интерактивными элементами.</a:t>
+            </a:r>
+          </a:p>
+          <a:p>
+            <a:r>
+              <a:rPr lang="ru-RU" sz="2200" dirty="0"/>
+              <a:t>Разработанный продукт представляет собой законченное, работоспособное решение, готовое к следующему этапу — публичному бета-тестированию и дальнейшему развитию.</a:t>
+            </a:r>
+          </a:p>
+          <a:p>
+            <a:endParaRPr lang="ru-RU" dirty="0"/>
+          </a:p>
+        </p:txBody>
+      </p:sp>
+    </p:spTree>
+    <p:extLst>
+      <p:ext uri="{BB962C8B-B14F-4D97-AF65-F5344CB8AC3E}">
+        <p14:creationId xmlns:p14="http://schemas.microsoft.com/office/powerpoint/2010/main" val="2020141601"/>
+      </p:ext>
+    </p:extLst>
+  </p:cSld>
+  <p:clrMapOvr>
+    <a:masterClrMapping/>
+  </p:clrMapOvr>
+</p:sld>
+</file>
+
+<file path=ppt/slides/slide2.xml><?xml version="1.0" encoding="utf-8"?>
+<p:sld xmlns:a="http://schemas.openxmlformats.org/drawingml/2006/main" xmlns:r="http://schemas.openxmlformats.org/officeDocument/2006/relationships" xmlns:p="http://schemas.openxmlformats.org/presentationml/2006/main">
+  <p:cSld>
+    <p:spTree>
+      <p:nvGrpSpPr>
+        <p:cNvPr id="1" name=""/>
+        <p:cNvGrpSpPr/>
+        <p:nvPr/>
+      </p:nvGrpSpPr>
+      <p:grpSpPr>
+        <a:xfrm>
+          <a:off x="0" y="0"/>
+          <a:ext cx="0" cy="0"/>
+          <a:chOff x="0" y="0"/>
+          <a:chExt cx="0" cy="0"/>
+        </a:xfrm>
+      </p:grpSpPr>
+      <p:sp>
+        <p:nvSpPr>
+          <p:cNvPr id="2" name="Заголовок 1"/>
+          <p:cNvSpPr>
+            <a:spLocks noGrp="1"/>
+          </p:cNvSpPr>
+          <p:nvPr>
+            <p:ph type="title"/>
+          </p:nvPr>
+        </p:nvSpPr>
+        <p:spPr>
+          <a:xfrm>
+            <a:off x="526351" y="790888"/>
+            <a:ext cx="10748374" cy="500332"/>
+          </a:xfrm>
+        </p:spPr>
+        <p:txBody>
+          <a:bodyPr>
+            <a:normAutofit/>
+          </a:bodyPr>
+          <a:lstStyle/>
+          <a:p>
+            <a:pPr algn="ctr"/>
+            <a:r>
+              <a:rPr lang="ru-RU" sz="2800" dirty="0">
+                <a:latin typeface="Times New Roman" panose="02020603050405020304" pitchFamily="18" charset="0"/>
+                <a:cs typeface="Times New Roman" panose="02020603050405020304" pitchFamily="18" charset="0"/>
+              </a:rPr>
+              <a:t>Цель:</a:t>
+            </a:r>
+          </a:p>
+        </p:txBody>
+      </p:sp>
+      <p:sp>
+        <p:nvSpPr>
+          <p:cNvPr id="4" name="Текст 3"/>
+          <p:cNvSpPr>
+            <a:spLocks noGrp="1"/>
+          </p:cNvSpPr>
+          <p:nvPr>
+            <p:ph type="body" sz="half" idx="2"/>
+          </p:nvPr>
+        </p:nvSpPr>
+        <p:spPr>
+          <a:xfrm>
+            <a:off x="1258787" y="1632247"/>
+            <a:ext cx="9714013" cy="4094607"/>
+          </a:xfrm>
+        </p:spPr>
+        <p:txBody>
+          <a:bodyPr>
+            <a:normAutofit/>
+          </a:bodyPr>
+          <a:lstStyle/>
+          <a:p>
+            <a:r>
+              <a:rPr lang="ru-RU" sz="2000" dirty="0">
+                <a:latin typeface="Times New Roman" panose="02020603050405020304" pitchFamily="18" charset="0"/>
+                <a:cs typeface="Times New Roman" panose="02020603050405020304" pitchFamily="18" charset="0"/>
+              </a:rPr>
+              <a:t>Разработка интерактивного веб-портала, предназначенного для болельщиков РФПЛ, с целью предоставления актуальной статистической информации и реализации набора интерактивных сервисов.</a:t>
+            </a:r>
+          </a:p>
+        </p:txBody>
+      </p:sp>
+    </p:spTree>
+    <p:extLst>
+      <p:ext uri="{BB962C8B-B14F-4D97-AF65-F5344CB8AC3E}">
+        <p14:creationId xmlns:p14="http://schemas.microsoft.com/office/powerpoint/2010/main" val="2501321342"/>
+      </p:ext>
+    </p:extLst>
+  </p:cSld>
+  <p:clrMapOvr>
+    <a:masterClrMapping/>
+  </p:clrMapOvr>
+</p:sld>
+</file>
+
+<file path=ppt/slides/slide3.xml><?xml version="1.0" encoding="utf-8"?>
 <p:sld xmlns:a="http://schemas.openxmlformats.org/drawingml/2006/main" xmlns:r="http://schemas.openxmlformats.org/officeDocument/2006/relationships" xmlns:p="http://schemas.openxmlformats.org/presentationml/2006/main">
   <p:cSld>
     <p:spTree>
@@ -4494,7 +4201,7 @@
         <p:cNvPr id="1" name="">
           <a:extLst>
             <a:ext uri="{FF2B5EF4-FFF2-40B4-BE49-F238E27FC236}">
-              <a16:creationId xmlns:a16="http://schemas.microsoft.com/office/drawing/2014/main" id="{D3F08455-63B1-D0C1-CB07-B42BA52F8A5A}"/>
+              <a16:creationId xmlns:a16="http://schemas.microsoft.com/office/drawing/2014/main" id="{38978688-9962-C26C-A69B-FEBFA37EE565}"/>
             </a:ext>
           </a:extLst>
         </p:cNvPr>
@@ -4511,10 +4218,312 @@
       </p:grpSpPr>
       <p:sp>
         <p:nvSpPr>
+          <p:cNvPr id="2" name="Заголовок 1">
+            <a:extLst>
+              <a:ext uri="{FF2B5EF4-FFF2-40B4-BE49-F238E27FC236}">
+                <a16:creationId xmlns:a16="http://schemas.microsoft.com/office/drawing/2014/main" id="{4584B5FB-C1C7-B686-2893-50895CFEA87F}"/>
+              </a:ext>
+            </a:extLst>
+          </p:cNvPr>
+          <p:cNvSpPr>
+            <a:spLocks noGrp="1"/>
+          </p:cNvSpPr>
+          <p:nvPr>
+            <p:ph type="title"/>
+          </p:nvPr>
+        </p:nvSpPr>
+        <p:spPr>
+          <a:xfrm>
+            <a:off x="526351" y="613723"/>
+            <a:ext cx="10748374" cy="500332"/>
+          </a:xfrm>
+        </p:spPr>
+        <p:txBody>
+          <a:bodyPr>
+            <a:normAutofit/>
+          </a:bodyPr>
+          <a:lstStyle/>
+          <a:p>
+            <a:r>
+              <a:rPr lang="ru-RU" sz="2800" dirty="0">
+                <a:latin typeface="Times New Roman" panose="02020603050405020304" pitchFamily="18" charset="0"/>
+                <a:cs typeface="Times New Roman" panose="02020603050405020304" pitchFamily="18" charset="0"/>
+              </a:rPr>
+              <a:t>Задачи:</a:t>
+            </a:r>
+          </a:p>
+        </p:txBody>
+      </p:sp>
+      <p:sp>
+        <p:nvSpPr>
+          <p:cNvPr id="4" name="Текст 3">
+            <a:extLst>
+              <a:ext uri="{FF2B5EF4-FFF2-40B4-BE49-F238E27FC236}">
+                <a16:creationId xmlns:a16="http://schemas.microsoft.com/office/drawing/2014/main" id="{4297316C-BF71-34E2-E0F9-09196637A76E}"/>
+              </a:ext>
+            </a:extLst>
+          </p:cNvPr>
+          <p:cNvSpPr>
+            <a:spLocks noGrp="1"/>
+          </p:cNvSpPr>
+          <p:nvPr>
+            <p:ph type="body" sz="half" idx="2"/>
+          </p:nvPr>
+        </p:nvSpPr>
+        <p:spPr>
+          <a:xfrm>
+            <a:off x="526351" y="1562884"/>
+            <a:ext cx="9700725" cy="4094607"/>
+          </a:xfrm>
+        </p:spPr>
+        <p:txBody>
+          <a:bodyPr>
+            <a:normAutofit fontScale="92500" lnSpcReduction="10000"/>
+          </a:bodyPr>
+          <a:lstStyle/>
+          <a:p>
+            <a:pPr marL="355600" indent="-355600">
+              <a:buFont typeface="+mj-lt"/>
+              <a:buAutoNum type="arabicPeriod"/>
+              <a:tabLst>
+                <a:tab pos="541338" algn="l"/>
+                <a:tab pos="630238" algn="l"/>
+              </a:tabLst>
+            </a:pPr>
+            <a:r>
+              <a:rPr lang="ru-RU" sz="2200" dirty="0">
+                <a:latin typeface="Times New Roman" panose="02020603050405020304" pitchFamily="18" charset="0"/>
+                <a:cs typeface="Times New Roman" panose="02020603050405020304" pitchFamily="18" charset="0"/>
+              </a:rPr>
+              <a:t>Разработать </a:t>
+            </a:r>
+            <a:r>
+              <a:rPr lang="ru-RU" sz="2200" dirty="0" err="1">
+                <a:latin typeface="Times New Roman" panose="02020603050405020304" pitchFamily="18" charset="0"/>
+                <a:cs typeface="Times New Roman" panose="02020603050405020304" pitchFamily="18" charset="0"/>
+              </a:rPr>
+              <a:t>backend</a:t>
+            </a:r>
+            <a:r>
+              <a:rPr lang="ru-RU" sz="2200" dirty="0">
+                <a:latin typeface="Times New Roman" panose="02020603050405020304" pitchFamily="18" charset="0"/>
+                <a:cs typeface="Times New Roman" panose="02020603050405020304" pitchFamily="18" charset="0"/>
+              </a:rPr>
+              <a:t> на </a:t>
+            </a:r>
+            <a:r>
+              <a:rPr lang="ru-RU" sz="2200" dirty="0" err="1">
+                <a:latin typeface="Times New Roman" panose="02020603050405020304" pitchFamily="18" charset="0"/>
+                <a:cs typeface="Times New Roman" panose="02020603050405020304" pitchFamily="18" charset="0"/>
+              </a:rPr>
+              <a:t>Flask</a:t>
+            </a:r>
+            <a:r>
+              <a:rPr lang="ru-RU" sz="2200" dirty="0">
+                <a:latin typeface="Times New Roman" panose="02020603050405020304" pitchFamily="18" charset="0"/>
+                <a:cs typeface="Times New Roman" panose="02020603050405020304" pitchFamily="18" charset="0"/>
+              </a:rPr>
+              <a:t> и спроектировать базу данных для хранения всей системной информации.</a:t>
+            </a:r>
+          </a:p>
+          <a:p>
+            <a:pPr marL="355600" indent="-355600">
+              <a:buFont typeface="+mj-lt"/>
+              <a:buAutoNum type="arabicPeriod"/>
+              <a:tabLst>
+                <a:tab pos="541338" algn="l"/>
+                <a:tab pos="630238" algn="l"/>
+              </a:tabLst>
+            </a:pPr>
+            <a:r>
+              <a:rPr lang="ru-RU" sz="2200" dirty="0">
+                <a:latin typeface="Times New Roman" panose="02020603050405020304" pitchFamily="18" charset="0"/>
+                <a:cs typeface="Times New Roman" panose="02020603050405020304" pitchFamily="18" charset="0"/>
+              </a:rPr>
+              <a:t>Реализовать систему безопасного входа и разделения прав пользователей.</a:t>
+            </a:r>
+          </a:p>
+          <a:p>
+            <a:pPr marL="355600" indent="-355600">
+              <a:buFont typeface="+mj-lt"/>
+              <a:buAutoNum type="arabicPeriod"/>
+              <a:tabLst>
+                <a:tab pos="541338" algn="l"/>
+                <a:tab pos="630238" algn="l"/>
+              </a:tabLst>
+            </a:pPr>
+            <a:r>
+              <a:rPr lang="ru-RU" sz="2200" dirty="0">
+                <a:latin typeface="Times New Roman" panose="02020603050405020304" pitchFamily="18" charset="0"/>
+                <a:cs typeface="Times New Roman" panose="02020603050405020304" pitchFamily="18" charset="0"/>
+              </a:rPr>
+              <a:t>Настроить автоматическое обновление спортивных данных через внешнее API.</a:t>
+            </a:r>
+          </a:p>
+          <a:p>
+            <a:pPr marL="355600" indent="-355600">
+              <a:buFont typeface="+mj-lt"/>
+              <a:buAutoNum type="arabicPeriod"/>
+              <a:tabLst>
+                <a:tab pos="541338" algn="l"/>
+                <a:tab pos="630238" algn="l"/>
+              </a:tabLst>
+            </a:pPr>
+            <a:r>
+              <a:rPr lang="ru-RU" sz="2200" dirty="0">
+                <a:latin typeface="Times New Roman" panose="02020603050405020304" pitchFamily="18" charset="0"/>
+                <a:cs typeface="Times New Roman" panose="02020603050405020304" pitchFamily="18" charset="0"/>
+              </a:rPr>
+              <a:t>Создать персонализированный профиль пользователя с возможностями кастомизации.</a:t>
+            </a:r>
+          </a:p>
+          <a:p>
+            <a:pPr marL="355600" indent="-355600">
+              <a:buFont typeface="+mj-lt"/>
+              <a:buAutoNum type="arabicPeriod"/>
+              <a:tabLst>
+                <a:tab pos="541338" algn="l"/>
+                <a:tab pos="630238" algn="l"/>
+              </a:tabLst>
+            </a:pPr>
+            <a:r>
+              <a:rPr lang="ru-RU" sz="2200" dirty="0">
+                <a:latin typeface="Times New Roman" panose="02020603050405020304" pitchFamily="18" charset="0"/>
+                <a:cs typeface="Times New Roman" panose="02020603050405020304" pitchFamily="18" charset="0"/>
+              </a:rPr>
+              <a:t>Внедрить три ключевых интерактивных модуля: Тесты, Ставки и систему Виртуального баланса.</a:t>
+            </a:r>
+          </a:p>
+          <a:p>
+            <a:pPr marL="355600" indent="-355600">
+              <a:buFont typeface="+mj-lt"/>
+              <a:buAutoNum type="arabicPeriod"/>
+              <a:tabLst>
+                <a:tab pos="541338" algn="l"/>
+                <a:tab pos="630238" algn="l"/>
+              </a:tabLst>
+            </a:pPr>
+            <a:r>
+              <a:rPr lang="ru-RU" sz="2200" dirty="0">
+                <a:latin typeface="Times New Roman" panose="02020603050405020304" pitchFamily="18" charset="0"/>
+                <a:cs typeface="Times New Roman" panose="02020603050405020304" pitchFamily="18" charset="0"/>
+              </a:rPr>
+              <a:t>Разработать инструменты администратора для управления платформой.</a:t>
+            </a:r>
+          </a:p>
+          <a:p>
+            <a:pPr marL="355600" indent="-355600">
+              <a:buFont typeface="+mj-lt"/>
+              <a:buAutoNum type="arabicPeriod"/>
+              <a:tabLst>
+                <a:tab pos="541338" algn="l"/>
+                <a:tab pos="630238" algn="l"/>
+              </a:tabLst>
+            </a:pPr>
+            <a:r>
+              <a:rPr lang="ru-RU" sz="2200" dirty="0">
+                <a:latin typeface="Times New Roman" panose="02020603050405020304" pitchFamily="18" charset="0"/>
+                <a:cs typeface="Times New Roman" panose="02020603050405020304" pitchFamily="18" charset="0"/>
+              </a:rPr>
+              <a:t>Провести тестирование работоспособности и удобства использования системы.</a:t>
+            </a:r>
+          </a:p>
+          <a:p>
+            <a:r>
+              <a:rPr lang="ru-RU" sz="2000" dirty="0"/>
+              <a:t/>
+            </a:r>
+            <a:br>
+              <a:rPr lang="ru-RU" sz="2000" dirty="0"/>
+            </a:br>
+            <a:endParaRPr lang="ru-RU" sz="2000" dirty="0">
+              <a:latin typeface="Times New Roman" panose="02020603050405020304" pitchFamily="18" charset="0"/>
+              <a:cs typeface="Times New Roman" panose="02020603050405020304" pitchFamily="18" charset="0"/>
+            </a:endParaRPr>
+          </a:p>
+        </p:txBody>
+      </p:sp>
+    </p:spTree>
+    <p:extLst>
+      <p:ext uri="{BB962C8B-B14F-4D97-AF65-F5344CB8AC3E}">
+        <p14:creationId xmlns:p14="http://schemas.microsoft.com/office/powerpoint/2010/main" val="2661151610"/>
+      </p:ext>
+    </p:extLst>
+  </p:cSld>
+  <p:clrMapOvr>
+    <a:masterClrMapping/>
+  </p:clrMapOvr>
+</p:sld>
+</file>
+
+<file path=ppt/slides/slide4.xml><?xml version="1.0" encoding="utf-8"?>
+<p:sld xmlns:a="http://schemas.openxmlformats.org/drawingml/2006/main" xmlns:r="http://schemas.openxmlformats.org/officeDocument/2006/relationships" xmlns:p="http://schemas.openxmlformats.org/presentationml/2006/main">
+  <p:cSld>
+    <p:spTree>
+      <p:nvGrpSpPr>
+        <p:cNvPr id="1" name="">
+          <a:extLst>
+            <a:ext uri="{FF2B5EF4-FFF2-40B4-BE49-F238E27FC236}">
+              <a16:creationId xmlns:a16="http://schemas.microsoft.com/office/drawing/2014/main" id="{6D4BDCFE-5F04-2367-50D7-ACBEF5B5E8A5}"/>
+            </a:ext>
+          </a:extLst>
+        </p:cNvPr>
+        <p:cNvGrpSpPr/>
+        <p:nvPr/>
+      </p:nvGrpSpPr>
+      <p:grpSpPr>
+        <a:xfrm>
+          <a:off x="0" y="0"/>
+          <a:ext cx="0" cy="0"/>
+          <a:chOff x="0" y="0"/>
+          <a:chExt cx="0" cy="0"/>
+        </a:xfrm>
+      </p:grpSpPr>
+      <p:sp>
+        <p:nvSpPr>
+          <p:cNvPr id="2" name="Заголовок 1">
+            <a:extLst>
+              <a:ext uri="{FF2B5EF4-FFF2-40B4-BE49-F238E27FC236}">
+                <a16:creationId xmlns:a16="http://schemas.microsoft.com/office/drawing/2014/main" id="{863A8C8B-99FD-62CE-5877-9B50754197C4}"/>
+              </a:ext>
+            </a:extLst>
+          </p:cNvPr>
+          <p:cNvSpPr>
+            <a:spLocks noGrp="1"/>
+          </p:cNvSpPr>
+          <p:nvPr>
+            <p:ph type="title"/>
+          </p:nvPr>
+        </p:nvSpPr>
+        <p:spPr>
+          <a:xfrm>
+            <a:off x="343270" y="204388"/>
+            <a:ext cx="11526677" cy="480131"/>
+          </a:xfrm>
+        </p:spPr>
+        <p:txBody>
+          <a:bodyPr wrap="square">
+            <a:spAutoFit/>
+          </a:bodyPr>
+          <a:lstStyle/>
+          <a:p>
+            <a:pPr algn="ctr"/>
+            <a:r>
+              <a:rPr lang="ru-RU" sz="2800" dirty="0">
+                <a:latin typeface="Times New Roman" panose="02020603050405020304" pitchFamily="18" charset="0"/>
+                <a:cs typeface="Times New Roman" panose="02020603050405020304" pitchFamily="18" charset="0"/>
+              </a:rPr>
+              <a:t>Основной функционал:</a:t>
+            </a:r>
+          </a:p>
+        </p:txBody>
+      </p:sp>
+      <p:sp>
+        <p:nvSpPr>
           <p:cNvPr id="3" name="Объект 2">
             <a:extLst>
               <a:ext uri="{FF2B5EF4-FFF2-40B4-BE49-F238E27FC236}">
-                <a16:creationId xmlns:a16="http://schemas.microsoft.com/office/drawing/2014/main" id="{6ECC13BF-C63B-F00F-81F9-E2F28A0D7320}"/>
+                <a16:creationId xmlns:a16="http://schemas.microsoft.com/office/drawing/2014/main" id="{0EDF6F45-4534-C7EA-7794-825E9B16EAE7}"/>
               </a:ext>
             </a:extLst>
           </p:cNvPr>
@@ -4527,8 +4536,8 @@
         </p:nvSpPr>
         <p:spPr>
           <a:xfrm>
-            <a:off x="343270" y="214874"/>
-            <a:ext cx="6371854" cy="2340746"/>
+            <a:off x="343270" y="2288662"/>
+            <a:ext cx="3883673" cy="2572394"/>
           </a:xfrm>
         </p:spPr>
         <p:txBody>
@@ -4545,7 +4554,7 @@
                 <a:latin typeface="Times New Roman" panose="02020603050405020304" pitchFamily="18" charset="0"/>
                 <a:cs typeface="Times New Roman" panose="02020603050405020304" pitchFamily="18" charset="0"/>
               </a:rPr>
-              <a:t>Профиль пользователя:</a:t>
+              <a:t>Регистрация и авторизация:</a:t>
             </a:r>
           </a:p>
           <a:p>
@@ -4554,7 +4563,7 @@
                 <a:latin typeface="Times New Roman" panose="02020603050405020304" pitchFamily="18" charset="0"/>
                 <a:cs typeface="Times New Roman" panose="02020603050405020304" pitchFamily="18" charset="0"/>
               </a:rPr>
-              <a:t>Настройка имени и информации "о себе"</a:t>
+              <a:t>Регистрация с выбором любимого клуба</a:t>
             </a:r>
           </a:p>
           <a:p>
@@ -4563,44 +4572,42 @@
                 <a:latin typeface="Times New Roman" panose="02020603050405020304" pitchFamily="18" charset="0"/>
                 <a:cs typeface="Times New Roman" panose="02020603050405020304" pitchFamily="18" charset="0"/>
               </a:rPr>
-              <a:t>Загрузка и изменение аватара</a:t>
-            </a:r>
-          </a:p>
-          <a:p>
-            <a:r>
-              <a:rPr lang="ru-RU" sz="2000" dirty="0">
-                <a:latin typeface="Times New Roman" panose="02020603050405020304" pitchFamily="18" charset="0"/>
-                <a:cs typeface="Times New Roman" panose="02020603050405020304" pitchFamily="18" charset="0"/>
-              </a:rPr>
-              <a:t>Просмотр текущего баланса монет</a:t>
-            </a:r>
-          </a:p>
-          <a:p>
-            <a:r>
-              <a:rPr lang="ru-RU" sz="2000" dirty="0">
-                <a:latin typeface="Times New Roman" panose="02020603050405020304" pitchFamily="18" charset="0"/>
-                <a:cs typeface="Times New Roman" panose="02020603050405020304" pitchFamily="18" charset="0"/>
-              </a:rPr>
-              <a:t>Статистика активности (ставки, тесты)</a:t>
-            </a:r>
-          </a:p>
-          <a:p>
-            <a:pPr marL="0" indent="0">
-              <a:buNone/>
-            </a:pPr>
-            <a:br>
-              <a:rPr lang="ru-RU" dirty="0"/>
-            </a:br>
-            <a:endParaRPr lang="ru-RU" sz="2400" dirty="0">
+              <a:t>Вход для зарегистрированных </a:t>
+            </a:r>
+            <a:r>
+              <a:rPr lang="ru-RU" sz="2000" dirty="0" smtClean="0">
+                <a:latin typeface="Times New Roman" panose="02020603050405020304" pitchFamily="18" charset="0"/>
+                <a:cs typeface="Times New Roman" panose="02020603050405020304" pitchFamily="18" charset="0"/>
+              </a:rPr>
+              <a:t>пользователей</a:t>
+            </a:r>
+            <a:endParaRPr lang="en-US" sz="2000" dirty="0" smtClean="0">
               <a:latin typeface="Times New Roman" panose="02020603050405020304" pitchFamily="18" charset="0"/>
               <a:cs typeface="Times New Roman" panose="02020603050405020304" pitchFamily="18" charset="0"/>
             </a:endParaRPr>
           </a:p>
           <a:p>
-            <a:pPr marL="0" indent="0">
-              <a:buNone/>
-            </a:pPr>
-            <a:endParaRPr lang="ru-RU" sz="2400" dirty="0"/>
+            <a:r>
+              <a:rPr lang="ru-RU" sz="2000" dirty="0" smtClean="0">
+                <a:latin typeface="Times New Roman" panose="02020603050405020304" pitchFamily="18" charset="0"/>
+                <a:cs typeface="Times New Roman" panose="02020603050405020304" pitchFamily="18" charset="0"/>
+              </a:rPr>
+              <a:t>При регистрации выдаётся 100</a:t>
+            </a:r>
+            <a:r>
+              <a:rPr lang="ru-RU" sz="2000" dirty="0">
+                <a:latin typeface="Times New Roman" panose="02020603050405020304" pitchFamily="18" charset="0"/>
+                <a:cs typeface="Times New Roman" panose="02020603050405020304" pitchFamily="18" charset="0"/>
+              </a:rPr>
+              <a:t> </a:t>
+            </a:r>
+            <a:r>
+              <a:rPr lang="ru-RU" sz="2000" dirty="0" smtClean="0">
+                <a:latin typeface="Times New Roman" panose="02020603050405020304" pitchFamily="18" charset="0"/>
+                <a:cs typeface="Times New Roman" panose="02020603050405020304" pitchFamily="18" charset="0"/>
+              </a:rPr>
+              <a:t>виртуальной валюты</a:t>
+            </a:r>
           </a:p>
         </p:txBody>
       </p:sp>
@@ -4609,7 +4616,7 @@
           <p:cNvPr id="10" name="Объект 2">
             <a:extLst>
               <a:ext uri="{FF2B5EF4-FFF2-40B4-BE49-F238E27FC236}">
-                <a16:creationId xmlns:a16="http://schemas.microsoft.com/office/drawing/2014/main" id="{35DCE67A-70B7-9698-8E7F-6AC1A2FF2CC2}"/>
+                <a16:creationId xmlns:a16="http://schemas.microsoft.com/office/drawing/2014/main" id="{396E3625-7885-53F6-B32C-74476FF84DE1}"/>
               </a:ext>
             </a:extLst>
           </p:cNvPr>
@@ -4620,8 +4627,8 @@
         </p:nvSpPr>
         <p:spPr>
           <a:xfrm>
-            <a:off x="6715124" y="214875"/>
-            <a:ext cx="5304222" cy="2852176"/>
+            <a:off x="6715124" y="684519"/>
+            <a:ext cx="5304222" cy="3086496"/>
           </a:xfrm>
           <a:prstGeom prst="rect">
             <a:avLst/>
@@ -4800,55 +4807,7 @@
             <a:pPr marL="0" indent="0">
               <a:buNone/>
             </a:pPr>
-            <a:r>
-              <a:rPr lang="ru-RU" sz="2400" dirty="0">
-                <a:latin typeface="Times New Roman" panose="02020603050405020304" pitchFamily="18" charset="0"/>
-                <a:cs typeface="Times New Roman" panose="02020603050405020304" pitchFamily="18" charset="0"/>
-              </a:rPr>
-              <a:t>Магазин тем оформления:</a:t>
-            </a:r>
-          </a:p>
-          <a:p>
-            <a:r>
-              <a:rPr lang="ru-RU" sz="2000" dirty="0">
-                <a:latin typeface="Times New Roman" panose="02020603050405020304" pitchFamily="18" charset="0"/>
-                <a:cs typeface="Times New Roman" panose="02020603050405020304" pitchFamily="18" charset="0"/>
-              </a:rPr>
-              <a:t>8 визуальных тем (синяя, темная, индиго, закат, лес, багровая, золотая, клубная)</a:t>
-            </a:r>
-          </a:p>
-          <a:p>
-            <a:r>
-              <a:rPr lang="ru-RU" sz="2000" dirty="0">
-                <a:latin typeface="Times New Roman" panose="02020603050405020304" pitchFamily="18" charset="0"/>
-                <a:cs typeface="Times New Roman" panose="02020603050405020304" pitchFamily="18" charset="0"/>
-              </a:rPr>
-              <a:t>Покупка премиальных тем за виртуальную валюту</a:t>
-            </a:r>
-          </a:p>
-          <a:p>
-            <a:r>
-              <a:rPr lang="ru-RU" sz="2000" dirty="0">
-                <a:latin typeface="Times New Roman" panose="02020603050405020304" pitchFamily="18" charset="0"/>
-                <a:cs typeface="Times New Roman" panose="02020603050405020304" pitchFamily="18" charset="0"/>
-              </a:rPr>
-              <a:t>Предпросмотр темы перед покупкой</a:t>
-            </a:r>
-          </a:p>
-          <a:p>
-            <a:r>
-              <a:rPr lang="ru-RU" sz="2000" dirty="0">
-                <a:latin typeface="Times New Roman" panose="02020603050405020304" pitchFamily="18" charset="0"/>
-                <a:cs typeface="Times New Roman" panose="02020603050405020304" pitchFamily="18" charset="0"/>
-              </a:rPr>
-              <a:t>Мгновенное применение выбранной темы</a:t>
-            </a:r>
-          </a:p>
-          <a:p>
-            <a:pPr marL="0" indent="0">
-              <a:buNone/>
-            </a:pPr>
-            <a:endParaRPr lang="ru-RU" sz="2400" dirty="0">
+            <a:endParaRPr lang="ru-RU" sz="2000" dirty="0">
               <a:latin typeface="Times New Roman" panose="02020603050405020304" pitchFamily="18" charset="0"/>
               <a:cs typeface="Times New Roman" panose="02020603050405020304" pitchFamily="18" charset="0"/>
             </a:endParaRPr>
@@ -4857,13 +4816,7 @@
       </p:sp>
       <p:pic>
         <p:nvPicPr>
-          <p:cNvPr id="8" name="Рисунок 7" descr="Изображение выглядит как текст, снимок экрана, Шрифт, диаграмма&#10;&#10;Содержимое, созданное искусственным интеллектом, может быть неверным.">
-            <a:extLst>
-              <a:ext uri="{FF2B5EF4-FFF2-40B4-BE49-F238E27FC236}">
-                <a16:creationId xmlns:a16="http://schemas.microsoft.com/office/drawing/2014/main" id="{28E46ACF-DF72-06F0-86F9-E02EC0461A81}"/>
-              </a:ext>
-            </a:extLst>
-          </p:cNvPr>
+          <p:cNvPr id="4" name="Рисунок 3"/>
           <p:cNvPicPr>
             <a:picLocks noChangeAspect="1"/>
           </p:cNvPicPr>
@@ -4877,38 +4830,8 @@
         </p:blipFill>
         <p:spPr>
           <a:xfrm>
-            <a:off x="348338" y="3429000"/>
-            <a:ext cx="5976262" cy="2696460"/>
-          </a:xfrm>
-          <a:prstGeom prst="rect">
-            <a:avLst/>
-          </a:prstGeom>
-        </p:spPr>
-      </p:pic>
-      <p:pic>
-        <p:nvPicPr>
-          <p:cNvPr id="14" name="Рисунок 13" descr="Изображение выглядит как текст, снимок экрана, Шрифт&#10;&#10;Содержимое, созданное искусственным интеллектом, может быть неверным.">
-            <a:extLst>
-              <a:ext uri="{FF2B5EF4-FFF2-40B4-BE49-F238E27FC236}">
-                <a16:creationId xmlns:a16="http://schemas.microsoft.com/office/drawing/2014/main" id="{B0182F5F-3A7E-2E88-8778-3AB60BB8ADDB}"/>
-              </a:ext>
-            </a:extLst>
-          </p:cNvPr>
-          <p:cNvPicPr>
-            <a:picLocks noChangeAspect="1"/>
-          </p:cNvPicPr>
-          <p:nvPr/>
-        </p:nvPicPr>
-        <p:blipFill>
-          <a:blip r:embed="rId3"/>
-          <a:stretch>
-            <a:fillRect/>
-          </a:stretch>
-        </p:blipFill>
-        <p:spPr>
-          <a:xfrm>
-            <a:off x="6715124" y="3429000"/>
-            <a:ext cx="4943476" cy="2696460"/>
+            <a:off x="4524331" y="1530299"/>
+            <a:ext cx="7345616" cy="4089121"/>
           </a:xfrm>
           <a:prstGeom prst="rect">
             <a:avLst/>
@@ -4918,7 +4841,7 @@
     </p:spTree>
     <p:extLst>
       <p:ext uri="{BB962C8B-B14F-4D97-AF65-F5344CB8AC3E}">
-        <p14:creationId xmlns:p14="http://schemas.microsoft.com/office/powerpoint/2010/main" val="3510147550"/>
+        <p14:creationId xmlns:p14="http://schemas.microsoft.com/office/powerpoint/2010/main" val="1832056001"/>
       </p:ext>
     </p:extLst>
   </p:cSld>
@@ -4928,7 +4851,7 @@
 </p:sld>
 </file>
 
-<file path=ppt/slides/slide7.xml><?xml version="1.0" encoding="utf-8"?>
+<file path=ppt/slides/slide5.xml><?xml version="1.0" encoding="utf-8"?>
 <p:sld xmlns:a="http://schemas.openxmlformats.org/drawingml/2006/main" xmlns:r="http://schemas.openxmlformats.org/officeDocument/2006/relationships" xmlns:p="http://schemas.openxmlformats.org/presentationml/2006/main">
   <p:cSld>
     <p:spTree>
@@ -4936,7 +4859,7 @@
         <p:cNvPr id="1" name="">
           <a:extLst>
             <a:ext uri="{FF2B5EF4-FFF2-40B4-BE49-F238E27FC236}">
-              <a16:creationId xmlns:a16="http://schemas.microsoft.com/office/drawing/2014/main" id="{F6C023E7-7AED-07E7-340E-CB2EABBE926A}"/>
+              <a16:creationId xmlns:a16="http://schemas.microsoft.com/office/drawing/2014/main" id="{6D4BDCFE-5F04-2367-50D7-ACBEF5B5E8A5}"/>
             </a:ext>
           </a:extLst>
         </p:cNvPr>
@@ -4956,7 +4879,7 @@
           <p:cNvPr id="3" name="Объект 2">
             <a:extLst>
               <a:ext uri="{FF2B5EF4-FFF2-40B4-BE49-F238E27FC236}">
-                <a16:creationId xmlns:a16="http://schemas.microsoft.com/office/drawing/2014/main" id="{6BBADCDA-181C-0A7C-208E-C65CD19C2538}"/>
+                <a16:creationId xmlns:a16="http://schemas.microsoft.com/office/drawing/2014/main" id="{0EDF6F45-4534-C7EA-7794-825E9B16EAE7}"/>
               </a:ext>
             </a:extLst>
           </p:cNvPr>
@@ -4969,8 +4892,8 @@
         </p:nvSpPr>
         <p:spPr>
           <a:xfrm>
-            <a:off x="343270" y="214874"/>
-            <a:ext cx="6371854" cy="2340746"/>
+            <a:off x="343270" y="127531"/>
+            <a:ext cx="5410549" cy="2340746"/>
           </a:xfrm>
         </p:spPr>
         <p:txBody>
@@ -4987,7 +4910,7 @@
                 <a:latin typeface="Times New Roman" panose="02020603050405020304" pitchFamily="18" charset="0"/>
                 <a:cs typeface="Times New Roman" panose="02020603050405020304" pitchFamily="18" charset="0"/>
               </a:rPr>
-              <a:t>Детали матча:</a:t>
+              <a:t>Главная страница:</a:t>
             </a:r>
           </a:p>
           <a:p>
@@ -4996,7 +4919,7 @@
                 <a:latin typeface="Times New Roman" panose="02020603050405020304" pitchFamily="18" charset="0"/>
                 <a:cs typeface="Times New Roman" panose="02020603050405020304" pitchFamily="18" charset="0"/>
               </a:rPr>
-              <a:t>Полная информация о матче (составы, статистика)</a:t>
+              <a:t>Турнирная таблица РПЛ с актуальными данными</a:t>
             </a:r>
           </a:p>
           <a:p>
@@ -5005,7 +4928,7 @@
                 <a:latin typeface="Times New Roman" panose="02020603050405020304" pitchFamily="18" charset="0"/>
                 <a:cs typeface="Times New Roman" panose="02020603050405020304" pitchFamily="18" charset="0"/>
               </a:rPr>
-              <a:t>Интерактивная статистика (владение мячом, удары, фолы)</a:t>
+              <a:t>Календарь матчей по турам с возможностью переключения</a:t>
             </a:r>
           </a:p>
           <a:p>
@@ -5014,7 +4937,7 @@
                 <a:latin typeface="Times New Roman" panose="02020603050405020304" pitchFamily="18" charset="0"/>
                 <a:cs typeface="Times New Roman" panose="02020603050405020304" pitchFamily="18" charset="0"/>
               </a:rPr>
-              <a:t>История формы команд (последние 5 матчей)</a:t>
+              <a:t>Информация о всех клубах РПЛ с картами стадионов</a:t>
             </a:r>
           </a:p>
           <a:p>
@@ -5023,13 +4946,17 @@
                 <a:latin typeface="Times New Roman" panose="02020603050405020304" pitchFamily="18" charset="0"/>
                 <a:cs typeface="Times New Roman" panose="02020603050405020304" pitchFamily="18" charset="0"/>
               </a:rPr>
-              <a:t>Чат для обсуждения матча с другими болельщиками</a:t>
+              <a:t>Автоматическое определение текущего тура</a:t>
             </a:r>
           </a:p>
           <a:p>
             <a:pPr marL="0" indent="0">
               <a:buNone/>
             </a:pPr>
+            <a:r>
+              <a:rPr lang="ru-RU" dirty="0"/>
+              <a:t/>
+            </a:r>
             <a:br>
               <a:rPr lang="ru-RU" dirty="0"/>
             </a:br>
@@ -5046,254 +4973,12 @@
           </a:p>
         </p:txBody>
       </p:sp>
-      <p:pic>
-        <p:nvPicPr>
-          <p:cNvPr id="4" name="Рисунок 3" descr="Изображение выглядит как текст, снимок экрана, число&#10;&#10;Содержимое, созданное искусственным интеллектом, может быть неверным.">
+      <p:sp>
+        <p:nvSpPr>
+          <p:cNvPr id="10" name="Объект 2">
             <a:extLst>
               <a:ext uri="{FF2B5EF4-FFF2-40B4-BE49-F238E27FC236}">
-                <a16:creationId xmlns:a16="http://schemas.microsoft.com/office/drawing/2014/main" id="{79FEDA92-DD36-59AA-4A22-8AA6A7CAF421}"/>
-              </a:ext>
-            </a:extLst>
-          </p:cNvPr>
-          <p:cNvPicPr>
-            <a:picLocks noChangeAspect="1"/>
-          </p:cNvPicPr>
-          <p:nvPr/>
-        </p:nvPicPr>
-        <p:blipFill>
-          <a:blip r:embed="rId2"/>
-          <a:stretch>
-            <a:fillRect/>
-          </a:stretch>
-        </p:blipFill>
-        <p:spPr>
-          <a:xfrm>
-            <a:off x="7238849" y="214874"/>
-            <a:ext cx="4609881" cy="6419850"/>
-          </a:xfrm>
-          <a:prstGeom prst="rect">
-            <a:avLst/>
-          </a:prstGeom>
-        </p:spPr>
-      </p:pic>
-      <p:pic>
-        <p:nvPicPr>
-          <p:cNvPr id="6" name="Рисунок 5" descr="Изображение выглядит как текст, снимок экрана, дисплей, программное обеспечение&#10;&#10;Содержимое, созданное искусственным интеллектом, может быть неверным.">
-            <a:extLst>
-              <a:ext uri="{FF2B5EF4-FFF2-40B4-BE49-F238E27FC236}">
-                <a16:creationId xmlns:a16="http://schemas.microsoft.com/office/drawing/2014/main" id="{F8BF0325-E3DD-CA70-4BCF-49693F431E17}"/>
-              </a:ext>
-            </a:extLst>
-          </p:cNvPr>
-          <p:cNvPicPr>
-            <a:picLocks noChangeAspect="1"/>
-          </p:cNvPicPr>
-          <p:nvPr/>
-        </p:nvPicPr>
-        <p:blipFill>
-          <a:blip r:embed="rId3"/>
-          <a:stretch>
-            <a:fillRect/>
-          </a:stretch>
-        </p:blipFill>
-        <p:spPr>
-          <a:xfrm>
-            <a:off x="343270" y="3305175"/>
-            <a:ext cx="6432469" cy="3329549"/>
-          </a:xfrm>
-          <a:prstGeom prst="rect">
-            <a:avLst/>
-          </a:prstGeom>
-        </p:spPr>
-      </p:pic>
-    </p:spTree>
-    <p:extLst>
-      <p:ext uri="{BB962C8B-B14F-4D97-AF65-F5344CB8AC3E}">
-        <p14:creationId xmlns:p14="http://schemas.microsoft.com/office/powerpoint/2010/main" val="1900876394"/>
-      </p:ext>
-    </p:extLst>
-  </p:cSld>
-  <p:clrMapOvr>
-    <a:masterClrMapping/>
-  </p:clrMapOvr>
-</p:sld>
-</file>
-
-<file path=ppt/slides/slide8.xml><?xml version="1.0" encoding="utf-8"?>
-<p:sld xmlns:a="http://schemas.openxmlformats.org/drawingml/2006/main" xmlns:r="http://schemas.openxmlformats.org/officeDocument/2006/relationships" xmlns:p="http://schemas.openxmlformats.org/presentationml/2006/main">
-  <p:cSld>
-    <p:spTree>
-      <p:nvGrpSpPr>
-        <p:cNvPr id="1" name="">
-          <a:extLst>
-            <a:ext uri="{FF2B5EF4-FFF2-40B4-BE49-F238E27FC236}">
-              <a16:creationId xmlns:a16="http://schemas.microsoft.com/office/drawing/2014/main" id="{F625F576-7655-C5C5-B3F3-247F42A1A40F}"/>
-            </a:ext>
-          </a:extLst>
-        </p:cNvPr>
-        <p:cNvGrpSpPr/>
-        <p:nvPr/>
-      </p:nvGrpSpPr>
-      <p:grpSpPr>
-        <a:xfrm>
-          <a:off x="0" y="0"/>
-          <a:ext cx="0" cy="0"/>
-          <a:chOff x="0" y="0"/>
-          <a:chExt cx="0" cy="0"/>
-        </a:xfrm>
-      </p:grpSpPr>
-      <p:sp>
-        <p:nvSpPr>
-          <p:cNvPr id="3" name="Объект 2">
-            <a:extLst>
-              <a:ext uri="{FF2B5EF4-FFF2-40B4-BE49-F238E27FC236}">
-                <a16:creationId xmlns:a16="http://schemas.microsoft.com/office/drawing/2014/main" id="{94A670AD-09BC-1A01-1292-39458EBC6440}"/>
-              </a:ext>
-            </a:extLst>
-          </p:cNvPr>
-          <p:cNvSpPr>
-            <a:spLocks noGrp="1"/>
-          </p:cNvSpPr>
-          <p:nvPr>
-            <p:ph idx="1"/>
-          </p:nvPr>
-        </p:nvSpPr>
-        <p:spPr>
-          <a:xfrm>
-            <a:off x="343270" y="214874"/>
-            <a:ext cx="6314705" cy="1671076"/>
-          </a:xfrm>
-        </p:spPr>
-        <p:txBody>
-          <a:bodyPr>
-            <a:noAutofit/>
-          </a:bodyPr>
-          <a:lstStyle/>
-          <a:p>
-            <a:pPr marL="0" indent="0">
-              <a:buNone/>
-            </a:pPr>
-            <a:r>
-              <a:rPr lang="ru-RU" sz="2400" dirty="0">
-                <a:latin typeface="Times New Roman" panose="02020603050405020304" pitchFamily="18" charset="0"/>
-                <a:cs typeface="Times New Roman" panose="02020603050405020304" pitchFamily="18" charset="0"/>
-              </a:rPr>
-              <a:t>Турнирная таблица:</a:t>
-            </a:r>
-          </a:p>
-          <a:p>
-            <a:r>
-              <a:rPr lang="ru-RU" sz="2000" dirty="0">
-                <a:latin typeface="Times New Roman" panose="02020603050405020304" pitchFamily="18" charset="0"/>
-                <a:cs typeface="Times New Roman" panose="02020603050405020304" pitchFamily="18" charset="0"/>
-              </a:rPr>
-              <a:t>Автоматическое обновление из внешнего API</a:t>
-            </a:r>
-          </a:p>
-          <a:p>
-            <a:r>
-              <a:rPr lang="ru-RU" sz="2000" dirty="0">
-                <a:latin typeface="Times New Roman" panose="02020603050405020304" pitchFamily="18" charset="0"/>
-                <a:cs typeface="Times New Roman" panose="02020603050405020304" pitchFamily="18" charset="0"/>
-              </a:rPr>
-              <a:t>Визуальное выделение клуба пользователя</a:t>
-            </a:r>
-          </a:p>
-          <a:p>
-            <a:r>
-              <a:rPr lang="ru-RU" sz="2000" dirty="0">
-                <a:latin typeface="Times New Roman" panose="02020603050405020304" pitchFamily="18" charset="0"/>
-                <a:cs typeface="Times New Roman" panose="02020603050405020304" pitchFamily="18" charset="0"/>
-              </a:rPr>
-              <a:t>Полная статистика команд (игры, победы, голы, очки)</a:t>
-            </a:r>
-          </a:p>
-          <a:p>
-            <a:pPr marL="0" indent="0">
-              <a:buNone/>
-            </a:pPr>
-            <a:br>
-              <a:rPr lang="ru-RU" dirty="0"/>
-            </a:br>
-            <a:endParaRPr lang="ru-RU" sz="2400" dirty="0">
-              <a:latin typeface="Times New Roman" panose="02020603050405020304" pitchFamily="18" charset="0"/>
-              <a:cs typeface="Times New Roman" panose="02020603050405020304" pitchFamily="18" charset="0"/>
-            </a:endParaRPr>
-          </a:p>
-          <a:p>
-            <a:pPr marL="0" indent="0">
-              <a:buNone/>
-            </a:pPr>
-            <a:endParaRPr lang="ru-RU" sz="2400" dirty="0"/>
-          </a:p>
-        </p:txBody>
-      </p:sp>
-      <p:pic>
-        <p:nvPicPr>
-          <p:cNvPr id="5" name="Рисунок 4" descr="Изображение выглядит как текст, снимок экрана, число, Параллельный&#10;&#10;Содержимое, созданное искусственным интеллектом, может быть неверным.">
-            <a:extLst>
-              <a:ext uri="{FF2B5EF4-FFF2-40B4-BE49-F238E27FC236}">
-                <a16:creationId xmlns:a16="http://schemas.microsoft.com/office/drawing/2014/main" id="{7BA57F0E-BFE5-F688-BFFB-B930800DB19A}"/>
-              </a:ext>
-            </a:extLst>
-          </p:cNvPr>
-          <p:cNvPicPr>
-            <a:picLocks noChangeAspect="1"/>
-          </p:cNvPicPr>
-          <p:nvPr/>
-        </p:nvPicPr>
-        <p:blipFill>
-          <a:blip r:embed="rId2"/>
-          <a:stretch>
-            <a:fillRect/>
-          </a:stretch>
-        </p:blipFill>
-        <p:spPr>
-          <a:xfrm>
-            <a:off x="343270" y="1977589"/>
-            <a:ext cx="6314705" cy="4665537"/>
-          </a:xfrm>
-          <a:prstGeom prst="rect">
-            <a:avLst/>
-          </a:prstGeom>
-        </p:spPr>
-      </p:pic>
-      <p:pic>
-        <p:nvPicPr>
-          <p:cNvPr id="8" name="Рисунок 7" descr="Изображение выглядит как текст, снимок экрана, Шрифт, логотип&#10;&#10;Содержимое, созданное искусственным интеллектом, может быть неверным.">
-            <a:extLst>
-              <a:ext uri="{FF2B5EF4-FFF2-40B4-BE49-F238E27FC236}">
-                <a16:creationId xmlns:a16="http://schemas.microsoft.com/office/drawing/2014/main" id="{54E7535B-E38A-7B81-C641-073D7C325456}"/>
-              </a:ext>
-            </a:extLst>
-          </p:cNvPr>
-          <p:cNvPicPr>
-            <a:picLocks noChangeAspect="1"/>
-          </p:cNvPicPr>
-          <p:nvPr/>
-        </p:nvPicPr>
-        <p:blipFill>
-          <a:blip r:embed="rId3"/>
-          <a:stretch>
-            <a:fillRect/>
-          </a:stretch>
-        </p:blipFill>
-        <p:spPr>
-          <a:xfrm>
-            <a:off x="6866612" y="2971799"/>
-            <a:ext cx="4982118" cy="3095625"/>
-          </a:xfrm>
-          <a:prstGeom prst="rect">
-            <a:avLst/>
-          </a:prstGeom>
-        </p:spPr>
-      </p:pic>
-      <p:sp>
-        <p:nvSpPr>
-          <p:cNvPr id="9" name="Объект 2">
-            <a:extLst>
-              <a:ext uri="{FF2B5EF4-FFF2-40B4-BE49-F238E27FC236}">
-                <a16:creationId xmlns:a16="http://schemas.microsoft.com/office/drawing/2014/main" id="{11CB7C3D-A337-B45F-14D1-FBF61FE93CCB}"/>
+                <a16:creationId xmlns:a16="http://schemas.microsoft.com/office/drawing/2014/main" id="{396E3625-7885-53F6-B32C-74476FF84DE1}"/>
               </a:ext>
             </a:extLst>
           </p:cNvPr>
@@ -5304,12 +4989,13 @@
         </p:nvSpPr>
         <p:spPr>
           <a:xfrm>
-            <a:off x="6866613" y="306513"/>
-            <a:ext cx="4982117" cy="2255712"/>
+            <a:off x="343270" y="3041351"/>
+            <a:ext cx="5304222" cy="3086496"/>
           </a:xfrm>
           <a:prstGeom prst="rect">
             <a:avLst/>
           </a:prstGeom>
+          <a:noFill/>
         </p:spPr>
         <p:txBody>
           <a:bodyPr vert="horz" lIns="91440" tIns="45720" rIns="91440" bIns="45720" rtlCol="0">
@@ -5488,7 +5174,7 @@
                 <a:latin typeface="Times New Roman" panose="02020603050405020304" pitchFamily="18" charset="0"/>
                 <a:cs typeface="Times New Roman" panose="02020603050405020304" pitchFamily="18" charset="0"/>
               </a:rPr>
-              <a:t>Тесты на знание РПЛ:</a:t>
+              <a:t>Система ставок:</a:t>
             </a:r>
           </a:p>
           <a:p>
@@ -5497,7 +5183,7 @@
                 <a:latin typeface="Times New Roman" panose="02020603050405020304" pitchFamily="18" charset="0"/>
                 <a:cs typeface="Times New Roman" panose="02020603050405020304" pitchFamily="18" charset="0"/>
               </a:rPr>
-              <a:t>Три уровня сложности: легкий, средний, сложный</a:t>
+              <a:t>Ставки на предстоящие матчи с виртуальной валютой</a:t>
             </a:r>
           </a:p>
           <a:p>
@@ -5506,7 +5192,7 @@
                 <a:latin typeface="Times New Roman" panose="02020603050405020304" pitchFamily="18" charset="0"/>
                 <a:cs typeface="Times New Roman" panose="02020603050405020304" pitchFamily="18" charset="0"/>
               </a:rPr>
-              <a:t>10 вопросов в каждом тесте</a:t>
+              <a:t>Три варианта исхода: победа хозяев, ничья, победа гостей</a:t>
             </a:r>
           </a:p>
           <a:p>
@@ -5515,7 +5201,7 @@
                 <a:latin typeface="Times New Roman" panose="02020603050405020304" pitchFamily="18" charset="0"/>
                 <a:cs typeface="Times New Roman" panose="02020603050405020304" pitchFamily="18" charset="0"/>
               </a:rPr>
-              <a:t>Награда монетами за правильные ответы</a:t>
+              <a:t>Автоматический расчет результатов после матчей</a:t>
             </a:r>
           </a:p>
           <a:p>
@@ -5524,35 +5210,39 @@
                 <a:latin typeface="Times New Roman" panose="02020603050405020304" pitchFamily="18" charset="0"/>
                 <a:cs typeface="Times New Roman" panose="02020603050405020304" pitchFamily="18" charset="0"/>
               </a:rPr>
-              <a:t>Подробный разбор результатов</a:t>
-            </a:r>
-          </a:p>
-          <a:p>
-            <a:pPr marL="0" indent="0">
-              <a:buFont typeface="Arial" panose="020B0604020202020204" pitchFamily="34" charset="0"/>
-              <a:buNone/>
-            </a:pPr>
-            <a:br>
-              <a:rPr lang="ru-RU" dirty="0"/>
-            </a:br>
-            <a:endParaRPr lang="ru-RU" sz="2400" dirty="0">
-              <a:latin typeface="Times New Roman" panose="02020603050405020304" pitchFamily="18" charset="0"/>
-              <a:cs typeface="Times New Roman" panose="02020603050405020304" pitchFamily="18" charset="0"/>
-            </a:endParaRPr>
-          </a:p>
-          <a:p>
-            <a:pPr marL="0" indent="0">
-              <a:buFont typeface="Arial" panose="020B0604020202020204" pitchFamily="34" charset="0"/>
-              <a:buNone/>
-            </a:pPr>
-            <a:endParaRPr lang="ru-RU" sz="2400" dirty="0"/>
-          </a:p>
-        </p:txBody>
-      </p:sp>
+              <a:t>Удвоение выигрыша при правильном прогнозе</a:t>
+            </a:r>
+          </a:p>
+        </p:txBody>
+      </p:sp>
+      <p:pic>
+        <p:nvPicPr>
+          <p:cNvPr id="4" name="Рисунок 3"/>
+          <p:cNvPicPr>
+            <a:picLocks noChangeAspect="1"/>
+          </p:cNvPicPr>
+          <p:nvPr/>
+        </p:nvPicPr>
+        <p:blipFill>
+          <a:blip r:embed="rId2"/>
+          <a:stretch>
+            <a:fillRect/>
+          </a:stretch>
+        </p:blipFill>
+        <p:spPr>
+          <a:xfrm>
+            <a:off x="5831456" y="1297904"/>
+            <a:ext cx="6176478" cy="3972836"/>
+          </a:xfrm>
+          <a:prstGeom prst="rect">
+            <a:avLst/>
+          </a:prstGeom>
+        </p:spPr>
+      </p:pic>
     </p:spTree>
     <p:extLst>
       <p:ext uri="{BB962C8B-B14F-4D97-AF65-F5344CB8AC3E}">
-        <p14:creationId xmlns:p14="http://schemas.microsoft.com/office/powerpoint/2010/main" val="4072055489"/>
+        <p14:creationId xmlns:p14="http://schemas.microsoft.com/office/powerpoint/2010/main" val="2163154418"/>
       </p:ext>
     </p:extLst>
   </p:cSld>
@@ -5562,7 +5252,152 @@
 </p:sld>
 </file>
 
-<file path=ppt/slides/slide9.xml><?xml version="1.0" encoding="utf-8"?>
+<file path=ppt/slides/slide6.xml><?xml version="1.0" encoding="utf-8"?>
+<p:sld xmlns:a="http://schemas.openxmlformats.org/drawingml/2006/main" xmlns:r="http://schemas.openxmlformats.org/officeDocument/2006/relationships" xmlns:p="http://schemas.openxmlformats.org/presentationml/2006/main">
+  <p:cSld>
+    <p:spTree>
+      <p:nvGrpSpPr>
+        <p:cNvPr id="1" name="">
+          <a:extLst>
+            <a:ext uri="{FF2B5EF4-FFF2-40B4-BE49-F238E27FC236}">
+              <a16:creationId xmlns:a16="http://schemas.microsoft.com/office/drawing/2014/main" id="{6D4BDCFE-5F04-2367-50D7-ACBEF5B5E8A5}"/>
+            </a:ext>
+          </a:extLst>
+        </p:cNvPr>
+        <p:cNvGrpSpPr/>
+        <p:nvPr/>
+      </p:nvGrpSpPr>
+      <p:grpSpPr>
+        <a:xfrm>
+          <a:off x="0" y="0"/>
+          <a:ext cx="0" cy="0"/>
+          <a:chOff x="0" y="0"/>
+          <a:chExt cx="0" cy="0"/>
+        </a:xfrm>
+      </p:grpSpPr>
+      <p:sp>
+        <p:nvSpPr>
+          <p:cNvPr id="3" name="Объект 2">
+            <a:extLst>
+              <a:ext uri="{FF2B5EF4-FFF2-40B4-BE49-F238E27FC236}">
+                <a16:creationId xmlns:a16="http://schemas.microsoft.com/office/drawing/2014/main" id="{0EDF6F45-4534-C7EA-7794-825E9B16EAE7}"/>
+              </a:ext>
+            </a:extLst>
+          </p:cNvPr>
+          <p:cNvSpPr>
+            <a:spLocks noGrp="1"/>
+          </p:cNvSpPr>
+          <p:nvPr>
+            <p:ph idx="1"/>
+          </p:nvPr>
+        </p:nvSpPr>
+        <p:spPr>
+          <a:xfrm>
+            <a:off x="7736108" y="2171991"/>
+            <a:ext cx="4237356" cy="2417262"/>
+          </a:xfrm>
+        </p:spPr>
+        <p:txBody>
+          <a:bodyPr>
+            <a:noAutofit/>
+          </a:bodyPr>
+          <a:lstStyle/>
+          <a:p>
+            <a:pPr marL="0" indent="0">
+              <a:buNone/>
+            </a:pPr>
+            <a:r>
+              <a:rPr lang="ru-RU" sz="2400" dirty="0">
+                <a:latin typeface="Times New Roman" panose="02020603050405020304" pitchFamily="18" charset="0"/>
+                <a:cs typeface="Times New Roman" panose="02020603050405020304" pitchFamily="18" charset="0"/>
+              </a:rPr>
+              <a:t>Турнирная таблица:</a:t>
+            </a:r>
+          </a:p>
+          <a:p>
+            <a:r>
+              <a:rPr lang="ru-RU" sz="2000" dirty="0">
+                <a:latin typeface="Times New Roman" panose="02020603050405020304" pitchFamily="18" charset="0"/>
+                <a:cs typeface="Times New Roman" panose="02020603050405020304" pitchFamily="18" charset="0"/>
+              </a:rPr>
+              <a:t>Автоматическое обновление из внешнего API</a:t>
+            </a:r>
+          </a:p>
+          <a:p>
+            <a:r>
+              <a:rPr lang="ru-RU" sz="2000" dirty="0">
+                <a:latin typeface="Times New Roman" panose="02020603050405020304" pitchFamily="18" charset="0"/>
+                <a:cs typeface="Times New Roman" panose="02020603050405020304" pitchFamily="18" charset="0"/>
+              </a:rPr>
+              <a:t>Визуальное выделение клуба пользователя</a:t>
+            </a:r>
+          </a:p>
+          <a:p>
+            <a:r>
+              <a:rPr lang="ru-RU" sz="2000" dirty="0">
+                <a:latin typeface="Times New Roman" panose="02020603050405020304" pitchFamily="18" charset="0"/>
+                <a:cs typeface="Times New Roman" panose="02020603050405020304" pitchFamily="18" charset="0"/>
+              </a:rPr>
+              <a:t>Полная статистика команд (игры, победы, голы, очки</a:t>
+            </a:r>
+            <a:r>
+              <a:rPr lang="ru-RU" dirty="0"/>
+              <a:t/>
+            </a:r>
+            <a:br>
+              <a:rPr lang="ru-RU" dirty="0"/>
+            </a:br>
+            <a:endParaRPr lang="ru-RU" sz="2400" dirty="0">
+              <a:latin typeface="Times New Roman" panose="02020603050405020304" pitchFamily="18" charset="0"/>
+              <a:cs typeface="Times New Roman" panose="02020603050405020304" pitchFamily="18" charset="0"/>
+            </a:endParaRPr>
+          </a:p>
+          <a:p>
+            <a:pPr marL="0" indent="0">
+              <a:buNone/>
+            </a:pPr>
+            <a:endParaRPr lang="ru-RU" sz="2400" dirty="0"/>
+          </a:p>
+        </p:txBody>
+      </p:sp>
+      <p:pic>
+        <p:nvPicPr>
+          <p:cNvPr id="2" name="Рисунок 1"/>
+          <p:cNvPicPr>
+            <a:picLocks noChangeAspect="1"/>
+          </p:cNvPicPr>
+          <p:nvPr/>
+        </p:nvPicPr>
+        <p:blipFill>
+          <a:blip r:embed="rId2"/>
+          <a:stretch>
+            <a:fillRect/>
+          </a:stretch>
+        </p:blipFill>
+        <p:spPr>
+          <a:xfrm>
+            <a:off x="170658" y="812852"/>
+            <a:ext cx="7026648" cy="5135540"/>
+          </a:xfrm>
+          <a:prstGeom prst="rect">
+            <a:avLst/>
+          </a:prstGeom>
+        </p:spPr>
+      </p:pic>
+    </p:spTree>
+    <p:extLst>
+      <p:ext uri="{BB962C8B-B14F-4D97-AF65-F5344CB8AC3E}">
+        <p14:creationId xmlns:p14="http://schemas.microsoft.com/office/powerpoint/2010/main" val="3643319081"/>
+      </p:ext>
+    </p:extLst>
+  </p:cSld>
+  <p:clrMapOvr>
+    <a:masterClrMapping/>
+  </p:clrMapOvr>
+</p:sld>
+</file>
+
+<file path=ppt/slides/slide7.xml><?xml version="1.0" encoding="utf-8"?>
 <p:sld xmlns:a="http://schemas.openxmlformats.org/drawingml/2006/main" xmlns:r="http://schemas.openxmlformats.org/officeDocument/2006/relationships" xmlns:p="http://schemas.openxmlformats.org/presentationml/2006/main">
   <p:cSld>
     <p:spTree>
@@ -5581,192 +5416,742 @@
       </p:grpSpPr>
       <p:sp>
         <p:nvSpPr>
-          <p:cNvPr id="2" name="Заголовок 1"/>
-          <p:cNvSpPr>
-            <a:spLocks noGrp="1"/>
-          </p:cNvSpPr>
-          <p:nvPr>
-            <p:ph type="title"/>
-          </p:nvPr>
+          <p:cNvPr id="20" name="TextBox 19">
+            <a:extLst>
+              <a:ext uri="{FF2B5EF4-FFF2-40B4-BE49-F238E27FC236}">
+                <a16:creationId xmlns:a16="http://schemas.microsoft.com/office/drawing/2014/main" id="{B407F7F1-A132-A65F-4072-BD6A420998FC}"/>
+              </a:ext>
+            </a:extLst>
+          </p:cNvPr>
+          <p:cNvSpPr txBox="1"/>
+          <p:nvPr/>
         </p:nvSpPr>
         <p:spPr>
           <a:xfrm>
-            <a:off x="838200" y="231914"/>
-            <a:ext cx="10515600" cy="521681"/>
+            <a:off x="335367" y="310685"/>
+            <a:ext cx="5193001" cy="1988597"/>
           </a:xfrm>
+          <a:prstGeom prst="rect">
+            <a:avLst/>
+          </a:prstGeom>
+          <a:noFill/>
+          <a:ln>
+            <a:noFill/>
+          </a:ln>
         </p:spPr>
         <p:txBody>
-          <a:bodyPr>
-            <a:spAutoFit/>
-          </a:bodyPr>
-          <a:lstStyle/>
-          <a:p>
-            <a:pPr algn="ctr"/>
-            <a:r>
-              <a:rPr lang="ru-RU" sz="2800" dirty="0">
-                <a:latin typeface="Times New Roman" panose="02020603050405020304" pitchFamily="18" charset="0"/>
-                <a:cs typeface="Times New Roman" panose="02020603050405020304" pitchFamily="18" charset="0"/>
-              </a:rPr>
-              <a:t>Уникальные отличия нашего фан-сайта от конкурентов</a:t>
-            </a:r>
-            <a:r>
-              <a:rPr lang="ru-RU" sz="3100" dirty="0">
-                <a:latin typeface="Times New Roman" panose="02020603050405020304" pitchFamily="18" charset="0"/>
-                <a:cs typeface="Times New Roman" panose="02020603050405020304" pitchFamily="18" charset="0"/>
-              </a:rPr>
-              <a:t>:</a:t>
-            </a:r>
-            <a:endParaRPr lang="ru-RU" sz="2800" dirty="0">
-              <a:latin typeface="Times New Roman" panose="02020603050405020304" pitchFamily="18" charset="0"/>
-              <a:cs typeface="Times New Roman" panose="02020603050405020304" pitchFamily="18" charset="0"/>
-            </a:endParaRPr>
-          </a:p>
-        </p:txBody>
-      </p:sp>
-      <p:sp>
-        <p:nvSpPr>
-          <p:cNvPr id="3" name="Объект 2"/>
-          <p:cNvSpPr>
-            <a:spLocks noGrp="1"/>
-          </p:cNvSpPr>
-          <p:nvPr>
-            <p:ph idx="1"/>
-          </p:nvPr>
-        </p:nvSpPr>
-        <p:spPr>
-          <a:xfrm>
-            <a:off x="838199" y="1164341"/>
-            <a:ext cx="10515599" cy="4529318"/>
-          </a:xfrm>
-        </p:spPr>
-        <p:txBody>
-          <a:bodyPr>
+          <a:bodyPr wrap="square" rtlCol="0">
             <a:normAutofit/>
           </a:bodyPr>
           <a:lstStyle/>
           <a:p>
-            <a:pPr marL="0" indent="0">
-              <a:buNone/>
+            <a:r>
+              <a:rPr lang="ru-RU" sz="2400" dirty="0">
+                <a:latin typeface="Times New Roman" panose="02020603050405020304" pitchFamily="18" charset="0"/>
+                <a:cs typeface="Times New Roman" panose="02020603050405020304" pitchFamily="18" charset="0"/>
+              </a:rPr>
+              <a:t>Колесо удачи:</a:t>
+            </a:r>
+          </a:p>
+          <a:p>
+            <a:pPr marL="285750" indent="-285750">
+              <a:buFont typeface="Arial" panose="020B0604020202020204" pitchFamily="34" charset="0"/>
+              <a:buChar char="•"/>
             </a:pPr>
             <a:r>
-              <a:rPr lang="ru-RU" sz="2400" dirty="0">
-                <a:latin typeface="Times New Roman" panose="02020603050405020304" pitchFamily="18" charset="0"/>
-                <a:cs typeface="Times New Roman" panose="02020603050405020304" pitchFamily="18" charset="0"/>
-              </a:rPr>
-              <a:t>1. Игровой подход:</a:t>
-            </a:r>
-          </a:p>
-          <a:p>
-            <a:r>
-              <a:rPr lang="ru-RU" sz="2000" dirty="0">
-                <a:latin typeface="Times New Roman" panose="02020603050405020304" pitchFamily="18" charset="0"/>
-                <a:cs typeface="Times New Roman" panose="02020603050405020304" pitchFamily="18" charset="0"/>
-              </a:rPr>
-              <a:t>Полноценная экономика с виртуальной валютой, магазином и системой заработка</a:t>
-            </a:r>
-          </a:p>
-          <a:p>
-            <a:r>
-              <a:rPr lang="ru-RU" sz="2000" dirty="0">
-                <a:latin typeface="Times New Roman" panose="02020603050405020304" pitchFamily="18" charset="0"/>
-                <a:cs typeface="Times New Roman" panose="02020603050405020304" pitchFamily="18" charset="0"/>
-              </a:rPr>
-              <a:t>Три уровня тестов (легкий/средний/сложный) с разными наградами — аналог игровых "уровней сложности"</a:t>
-            </a:r>
-          </a:p>
-          <a:p>
-            <a:r>
-              <a:rPr lang="ru-RU" sz="2000" dirty="0">
-                <a:latin typeface="Times New Roman" panose="02020603050405020304" pitchFamily="18" charset="0"/>
-                <a:cs typeface="Times New Roman" panose="02020603050405020304" pitchFamily="18" charset="0"/>
-              </a:rPr>
-              <a:t>Колесо удачи с ежедневными наградами — механика из мобильных игр</a:t>
-            </a:r>
-          </a:p>
-          <a:p>
-            <a:pPr marL="0" indent="0">
-              <a:buNone/>
+              <a:rPr lang="ru-RU" dirty="0"/>
+              <a:t>Ежедневная возможность вращения (раз в 24 часа)</a:t>
+            </a:r>
+          </a:p>
+          <a:p>
+            <a:pPr marL="285750" indent="-285750">
+              <a:buFont typeface="Arial" panose="020B0604020202020204" pitchFamily="34" charset="0"/>
+              <a:buChar char="•"/>
             </a:pPr>
+            <a:r>
+              <a:rPr lang="ru-RU" dirty="0"/>
+              <a:t>10 секторов с разными призами/штрафами</a:t>
+            </a:r>
+          </a:p>
+          <a:p>
+            <a:pPr marL="285750" indent="-285750">
+              <a:buFont typeface="Arial" panose="020B0604020202020204" pitchFamily="34" charset="0"/>
+              <a:buChar char="•"/>
+            </a:pPr>
+            <a:r>
+              <a:rPr lang="ru-RU" dirty="0"/>
+              <a:t>Анимация вращения и визуальные эффекты</a:t>
+            </a:r>
+          </a:p>
+          <a:p>
+            <a:pPr marL="285750" indent="-285750">
+              <a:buFont typeface="Arial" panose="020B0604020202020204" pitchFamily="34" charset="0"/>
+              <a:buChar char="•"/>
+            </a:pPr>
+            <a:r>
+              <a:rPr lang="ru-RU" dirty="0"/>
+              <a:t>Система вероятностей для разных призов</a:t>
+            </a:r>
+          </a:p>
+          <a:p>
             <a:endParaRPr lang="ru-RU" sz="2000" dirty="0">
               <a:latin typeface="Times New Roman" panose="02020603050405020304" pitchFamily="18" charset="0"/>
               <a:cs typeface="Times New Roman" panose="02020603050405020304" pitchFamily="18" charset="0"/>
             </a:endParaRPr>
           </a:p>
           <a:p>
-            <a:pPr marL="0" indent="0">
-              <a:buNone/>
-            </a:pPr>
-            <a:r>
-              <a:rPr lang="ru-RU" sz="2400" dirty="0">
-                <a:latin typeface="Times New Roman" panose="02020603050405020304" pitchFamily="18" charset="0"/>
-                <a:cs typeface="Times New Roman" panose="02020603050405020304" pitchFamily="18" charset="0"/>
-              </a:rPr>
-              <a:t>2. Продвинутая система персонализации:</a:t>
-            </a:r>
-          </a:p>
-          <a:p>
-            <a:r>
-              <a:rPr lang="ru-RU" sz="2000" dirty="0">
-                <a:latin typeface="Times New Roman" panose="02020603050405020304" pitchFamily="18" charset="0"/>
-                <a:cs typeface="Times New Roman" panose="02020603050405020304" pitchFamily="18" charset="0"/>
-              </a:rPr>
-              <a:t>8 кастомизируемых тем (индиго, закат, лес и т.д.)</a:t>
-            </a:r>
-          </a:p>
-          <a:p>
-            <a:r>
-              <a:rPr lang="ru-RU" sz="2000" dirty="0">
-                <a:latin typeface="Times New Roman" panose="02020603050405020304" pitchFamily="18" charset="0"/>
-                <a:cs typeface="Times New Roman" panose="02020603050405020304" pitchFamily="18" charset="0"/>
-              </a:rPr>
-              <a:t>Клубная тема оформления с автоматическим применением цветов команды</a:t>
-            </a:r>
-          </a:p>
-          <a:p>
-            <a:r>
-              <a:rPr lang="ru-RU" sz="2000" dirty="0">
-                <a:latin typeface="Times New Roman" panose="02020603050405020304" pitchFamily="18" charset="0"/>
-                <a:cs typeface="Times New Roman" panose="02020603050405020304" pitchFamily="18" charset="0"/>
-              </a:rPr>
-              <a:t>Интерактивный предпросмотр тем и рамок при наведении</a:t>
-            </a:r>
-          </a:p>
-          <a:p>
-            <a:pPr marL="0" indent="0">
-              <a:buNone/>
-            </a:pPr>
-            <a:endParaRPr lang="ru-RU" sz="2000" dirty="0">
+            <a:endParaRPr lang="ru-RU" sz="2400" dirty="0">
               <a:latin typeface="Times New Roman" panose="02020603050405020304" pitchFamily="18" charset="0"/>
               <a:cs typeface="Times New Roman" panose="02020603050405020304" pitchFamily="18" charset="0"/>
             </a:endParaRPr>
           </a:p>
-          <a:p>
-            <a:endParaRPr lang="ru-RU" sz="2000" dirty="0">
+        </p:txBody>
+      </p:sp>
+    </p:spTree>
+    <p:extLst>
+      <p:ext uri="{BB962C8B-B14F-4D97-AF65-F5344CB8AC3E}">
+        <p14:creationId xmlns:p14="http://schemas.microsoft.com/office/powerpoint/2010/main" val="1654919368"/>
+      </p:ext>
+    </p:extLst>
+  </p:cSld>
+  <p:clrMapOvr>
+    <a:masterClrMapping/>
+  </p:clrMapOvr>
+</p:sld>
+</file>
+
+<file path=ppt/slides/slide8.xml><?xml version="1.0" encoding="utf-8"?>
+<p:sld xmlns:a="http://schemas.openxmlformats.org/drawingml/2006/main" xmlns:r="http://schemas.openxmlformats.org/officeDocument/2006/relationships" xmlns:p="http://schemas.openxmlformats.org/presentationml/2006/main">
+  <p:cSld>
+    <p:spTree>
+      <p:nvGrpSpPr>
+        <p:cNvPr id="1" name="">
+          <a:extLst>
+            <a:ext uri="{FF2B5EF4-FFF2-40B4-BE49-F238E27FC236}">
+              <a16:creationId xmlns:a16="http://schemas.microsoft.com/office/drawing/2014/main" id="{D3F08455-63B1-D0C1-CB07-B42BA52F8A5A}"/>
+            </a:ext>
+          </a:extLst>
+        </p:cNvPr>
+        <p:cNvGrpSpPr/>
+        <p:nvPr/>
+      </p:nvGrpSpPr>
+      <p:grpSpPr>
+        <a:xfrm>
+          <a:off x="0" y="0"/>
+          <a:ext cx="0" cy="0"/>
+          <a:chOff x="0" y="0"/>
+          <a:chExt cx="0" cy="0"/>
+        </a:xfrm>
+      </p:grpSpPr>
+      <p:sp>
+        <p:nvSpPr>
+          <p:cNvPr id="3" name="Объект 2">
+            <a:extLst>
+              <a:ext uri="{FF2B5EF4-FFF2-40B4-BE49-F238E27FC236}">
+                <a16:creationId xmlns:a16="http://schemas.microsoft.com/office/drawing/2014/main" id="{6ECC13BF-C63B-F00F-81F9-E2F28A0D7320}"/>
+              </a:ext>
+            </a:extLst>
+          </p:cNvPr>
+          <p:cNvSpPr>
+            <a:spLocks noGrp="1"/>
+          </p:cNvSpPr>
+          <p:nvPr>
+            <p:ph idx="1"/>
+          </p:nvPr>
+        </p:nvSpPr>
+        <p:spPr>
+          <a:xfrm>
+            <a:off x="343270" y="214874"/>
+            <a:ext cx="6371854" cy="2340746"/>
+          </a:xfrm>
+        </p:spPr>
+        <p:txBody>
+          <a:bodyPr>
+            <a:noAutofit/>
+          </a:bodyPr>
+          <a:lstStyle/>
+          <a:p>
+            <a:pPr marL="0" indent="0">
+              <a:buNone/>
+            </a:pPr>
+            <a:r>
+              <a:rPr lang="ru-RU" sz="2400" dirty="0">
+                <a:latin typeface="Times New Roman" panose="02020603050405020304" pitchFamily="18" charset="0"/>
+                <a:cs typeface="Times New Roman" panose="02020603050405020304" pitchFamily="18" charset="0"/>
+              </a:rPr>
+              <a:t>Профиль пользователя:</a:t>
+            </a:r>
+          </a:p>
+          <a:p>
+            <a:r>
+              <a:rPr lang="ru-RU" sz="2000" dirty="0">
+                <a:latin typeface="Times New Roman" panose="02020603050405020304" pitchFamily="18" charset="0"/>
+                <a:cs typeface="Times New Roman" panose="02020603050405020304" pitchFamily="18" charset="0"/>
+              </a:rPr>
+              <a:t>Настройка имени и информации "о себе"</a:t>
+            </a:r>
+          </a:p>
+          <a:p>
+            <a:r>
+              <a:rPr lang="ru-RU" sz="2000" dirty="0">
+                <a:latin typeface="Times New Roman" panose="02020603050405020304" pitchFamily="18" charset="0"/>
+                <a:cs typeface="Times New Roman" panose="02020603050405020304" pitchFamily="18" charset="0"/>
+              </a:rPr>
+              <a:t>Загрузка и изменение аватара</a:t>
+            </a:r>
+          </a:p>
+          <a:p>
+            <a:r>
+              <a:rPr lang="ru-RU" sz="2000" dirty="0">
+                <a:latin typeface="Times New Roman" panose="02020603050405020304" pitchFamily="18" charset="0"/>
+                <a:cs typeface="Times New Roman" panose="02020603050405020304" pitchFamily="18" charset="0"/>
+              </a:rPr>
+              <a:t>Просмотр текущего баланса монет</a:t>
+            </a:r>
+          </a:p>
+          <a:p>
+            <a:r>
+              <a:rPr lang="ru-RU" sz="2000" dirty="0">
+                <a:latin typeface="Times New Roman" panose="02020603050405020304" pitchFamily="18" charset="0"/>
+                <a:cs typeface="Times New Roman" panose="02020603050405020304" pitchFamily="18" charset="0"/>
+              </a:rPr>
+              <a:t>Статистика активности (ставки, тесты)</a:t>
+            </a:r>
+          </a:p>
+          <a:p>
+            <a:pPr marL="0" indent="0">
+              <a:buNone/>
+            </a:pPr>
+            <a:r>
+              <a:rPr lang="ru-RU" dirty="0"/>
+              <a:t/>
+            </a:r>
+            <a:br>
+              <a:rPr lang="ru-RU" dirty="0"/>
+            </a:br>
+            <a:endParaRPr lang="ru-RU" sz="2400" dirty="0">
               <a:latin typeface="Times New Roman" panose="02020603050405020304" pitchFamily="18" charset="0"/>
               <a:cs typeface="Times New Roman" panose="02020603050405020304" pitchFamily="18" charset="0"/>
             </a:endParaRPr>
           </a:p>
           <a:p>
-            <a:endParaRPr lang="ru-RU" sz="2000" dirty="0">
+            <a:pPr marL="0" indent="0">
+              <a:buNone/>
+            </a:pPr>
+            <a:endParaRPr lang="ru-RU" sz="2400" dirty="0"/>
+          </a:p>
+        </p:txBody>
+      </p:sp>
+      <p:sp>
+        <p:nvSpPr>
+          <p:cNvPr id="10" name="Объект 2">
+            <a:extLst>
+              <a:ext uri="{FF2B5EF4-FFF2-40B4-BE49-F238E27FC236}">
+                <a16:creationId xmlns:a16="http://schemas.microsoft.com/office/drawing/2014/main" id="{35DCE67A-70B7-9698-8E7F-6AC1A2FF2CC2}"/>
+              </a:ext>
+            </a:extLst>
+          </p:cNvPr>
+          <p:cNvSpPr txBox="1">
+            <a:spLocks/>
+          </p:cNvSpPr>
+          <p:nvPr/>
+        </p:nvSpPr>
+        <p:spPr>
+          <a:xfrm>
+            <a:off x="6715124" y="214875"/>
+            <a:ext cx="5304222" cy="2852176"/>
+          </a:xfrm>
+          <a:prstGeom prst="rect">
+            <a:avLst/>
+          </a:prstGeom>
+          <a:noFill/>
+        </p:spPr>
+        <p:txBody>
+          <a:bodyPr vert="horz" lIns="91440" tIns="45720" rIns="91440" bIns="45720" rtlCol="0">
+            <a:noAutofit/>
+          </a:bodyPr>
+          <a:lstStyle>
+            <a:lvl1pPr marL="228600" indent="-228600" algn="l" defTabSz="914400" rtl="0" eaLnBrk="1" latinLnBrk="0" hangingPunct="1">
+              <a:lnSpc>
+                <a:spcPct val="90000"/>
+              </a:lnSpc>
+              <a:spcBef>
+                <a:spcPts val="1000"/>
+              </a:spcBef>
+              <a:buFont typeface="Arial" panose="020B0604020202020204" pitchFamily="34" charset="0"/>
+              <a:buChar char="•"/>
+              <a:defRPr sz="2800" kern="1200">
+                <a:solidFill>
+                  <a:schemeClr val="tx1"/>
+                </a:solidFill>
+                <a:latin typeface="+mn-lt"/>
+                <a:ea typeface="+mn-ea"/>
+                <a:cs typeface="+mn-cs"/>
+              </a:defRPr>
+            </a:lvl1pPr>
+            <a:lvl2pPr marL="685800" indent="-228600" algn="l" defTabSz="914400" rtl="0" eaLnBrk="1" latinLnBrk="0" hangingPunct="1">
+              <a:lnSpc>
+                <a:spcPct val="90000"/>
+              </a:lnSpc>
+              <a:spcBef>
+                <a:spcPts val="500"/>
+              </a:spcBef>
+              <a:buFont typeface="Arial" panose="020B0604020202020204" pitchFamily="34" charset="0"/>
+              <a:buChar char="•"/>
+              <a:defRPr sz="2400" kern="1200">
+                <a:solidFill>
+                  <a:schemeClr val="tx1"/>
+                </a:solidFill>
+                <a:latin typeface="+mn-lt"/>
+                <a:ea typeface="+mn-ea"/>
+                <a:cs typeface="+mn-cs"/>
+              </a:defRPr>
+            </a:lvl2pPr>
+            <a:lvl3pPr marL="1143000" indent="-228600" algn="l" defTabSz="914400" rtl="0" eaLnBrk="1" latinLnBrk="0" hangingPunct="1">
+              <a:lnSpc>
+                <a:spcPct val="90000"/>
+              </a:lnSpc>
+              <a:spcBef>
+                <a:spcPts val="500"/>
+              </a:spcBef>
+              <a:buFont typeface="Arial" panose="020B0604020202020204" pitchFamily="34" charset="0"/>
+              <a:buChar char="•"/>
+              <a:defRPr sz="2000" kern="1200">
+                <a:solidFill>
+                  <a:schemeClr val="tx1"/>
+                </a:solidFill>
+                <a:latin typeface="+mn-lt"/>
+                <a:ea typeface="+mn-ea"/>
+                <a:cs typeface="+mn-cs"/>
+              </a:defRPr>
+            </a:lvl3pPr>
+            <a:lvl4pPr marL="1600200" indent="-228600" algn="l" defTabSz="914400" rtl="0" eaLnBrk="1" latinLnBrk="0" hangingPunct="1">
+              <a:lnSpc>
+                <a:spcPct val="90000"/>
+              </a:lnSpc>
+              <a:spcBef>
+                <a:spcPts val="500"/>
+              </a:spcBef>
+              <a:buFont typeface="Arial" panose="020B0604020202020204" pitchFamily="34" charset="0"/>
+              <a:buChar char="•"/>
+              <a:defRPr sz="1800" kern="1200">
+                <a:solidFill>
+                  <a:schemeClr val="tx1"/>
+                </a:solidFill>
+                <a:latin typeface="+mn-lt"/>
+                <a:ea typeface="+mn-ea"/>
+                <a:cs typeface="+mn-cs"/>
+              </a:defRPr>
+            </a:lvl4pPr>
+            <a:lvl5pPr marL="2057400" indent="-228600" algn="l" defTabSz="914400" rtl="0" eaLnBrk="1" latinLnBrk="0" hangingPunct="1">
+              <a:lnSpc>
+                <a:spcPct val="90000"/>
+              </a:lnSpc>
+              <a:spcBef>
+                <a:spcPts val="500"/>
+              </a:spcBef>
+              <a:buFont typeface="Arial" panose="020B0604020202020204" pitchFamily="34" charset="0"/>
+              <a:buChar char="•"/>
+              <a:defRPr sz="1800" kern="1200">
+                <a:solidFill>
+                  <a:schemeClr val="tx1"/>
+                </a:solidFill>
+                <a:latin typeface="+mn-lt"/>
+                <a:ea typeface="+mn-ea"/>
+                <a:cs typeface="+mn-cs"/>
+              </a:defRPr>
+            </a:lvl5pPr>
+            <a:lvl6pPr marL="2514600" indent="-228600" algn="l" defTabSz="914400" rtl="0" eaLnBrk="1" latinLnBrk="0" hangingPunct="1">
+              <a:lnSpc>
+                <a:spcPct val="90000"/>
+              </a:lnSpc>
+              <a:spcBef>
+                <a:spcPts val="500"/>
+              </a:spcBef>
+              <a:buFont typeface="Arial" panose="020B0604020202020204" pitchFamily="34" charset="0"/>
+              <a:buChar char="•"/>
+              <a:defRPr sz="1800" kern="1200">
+                <a:solidFill>
+                  <a:schemeClr val="tx1"/>
+                </a:solidFill>
+                <a:latin typeface="+mn-lt"/>
+                <a:ea typeface="+mn-ea"/>
+                <a:cs typeface="+mn-cs"/>
+              </a:defRPr>
+            </a:lvl6pPr>
+            <a:lvl7pPr marL="2971800" indent="-228600" algn="l" defTabSz="914400" rtl="0" eaLnBrk="1" latinLnBrk="0" hangingPunct="1">
+              <a:lnSpc>
+                <a:spcPct val="90000"/>
+              </a:lnSpc>
+              <a:spcBef>
+                <a:spcPts val="500"/>
+              </a:spcBef>
+              <a:buFont typeface="Arial" panose="020B0604020202020204" pitchFamily="34" charset="0"/>
+              <a:buChar char="•"/>
+              <a:defRPr sz="1800" kern="1200">
+                <a:solidFill>
+                  <a:schemeClr val="tx1"/>
+                </a:solidFill>
+                <a:latin typeface="+mn-lt"/>
+                <a:ea typeface="+mn-ea"/>
+                <a:cs typeface="+mn-cs"/>
+              </a:defRPr>
+            </a:lvl7pPr>
+            <a:lvl8pPr marL="3429000" indent="-228600" algn="l" defTabSz="914400" rtl="0" eaLnBrk="1" latinLnBrk="0" hangingPunct="1">
+              <a:lnSpc>
+                <a:spcPct val="90000"/>
+              </a:lnSpc>
+              <a:spcBef>
+                <a:spcPts val="500"/>
+              </a:spcBef>
+              <a:buFont typeface="Arial" panose="020B0604020202020204" pitchFamily="34" charset="0"/>
+              <a:buChar char="•"/>
+              <a:defRPr sz="1800" kern="1200">
+                <a:solidFill>
+                  <a:schemeClr val="tx1"/>
+                </a:solidFill>
+                <a:latin typeface="+mn-lt"/>
+                <a:ea typeface="+mn-ea"/>
+                <a:cs typeface="+mn-cs"/>
+              </a:defRPr>
+            </a:lvl8pPr>
+            <a:lvl9pPr marL="3886200" indent="-228600" algn="l" defTabSz="914400" rtl="0" eaLnBrk="1" latinLnBrk="0" hangingPunct="1">
+              <a:lnSpc>
+                <a:spcPct val="90000"/>
+              </a:lnSpc>
+              <a:spcBef>
+                <a:spcPts val="500"/>
+              </a:spcBef>
+              <a:buFont typeface="Arial" panose="020B0604020202020204" pitchFamily="34" charset="0"/>
+              <a:buChar char="•"/>
+              <a:defRPr sz="1800" kern="1200">
+                <a:solidFill>
+                  <a:schemeClr val="tx1"/>
+                </a:solidFill>
+                <a:latin typeface="+mn-lt"/>
+                <a:ea typeface="+mn-ea"/>
+                <a:cs typeface="+mn-cs"/>
+              </a:defRPr>
+            </a:lvl9pPr>
+          </a:lstStyle>
+          <a:p>
+            <a:pPr marL="0" indent="0">
+              <a:buNone/>
+            </a:pPr>
+            <a:r>
+              <a:rPr lang="ru-RU" sz="2400" dirty="0">
+                <a:latin typeface="Times New Roman" panose="02020603050405020304" pitchFamily="18" charset="0"/>
+                <a:cs typeface="Times New Roman" panose="02020603050405020304" pitchFamily="18" charset="0"/>
+              </a:rPr>
+              <a:t>Магазин тем оформления:</a:t>
+            </a:r>
+          </a:p>
+          <a:p>
+            <a:r>
+              <a:rPr lang="ru-RU" sz="2000" dirty="0">
+                <a:latin typeface="Times New Roman" panose="02020603050405020304" pitchFamily="18" charset="0"/>
+                <a:cs typeface="Times New Roman" panose="02020603050405020304" pitchFamily="18" charset="0"/>
+              </a:rPr>
+              <a:t>8 визуальных тем (синяя, темная, индиго, закат, лес, багровая, золотая, клубная)</a:t>
+            </a:r>
+          </a:p>
+          <a:p>
+            <a:r>
+              <a:rPr lang="ru-RU" sz="2000" dirty="0">
+                <a:latin typeface="Times New Roman" panose="02020603050405020304" pitchFamily="18" charset="0"/>
+                <a:cs typeface="Times New Roman" panose="02020603050405020304" pitchFamily="18" charset="0"/>
+              </a:rPr>
+              <a:t>Покупка премиальных тем за виртуальную валюту</a:t>
+            </a:r>
+          </a:p>
+          <a:p>
+            <a:r>
+              <a:rPr lang="ru-RU" sz="2000" dirty="0">
+                <a:latin typeface="Times New Roman" panose="02020603050405020304" pitchFamily="18" charset="0"/>
+                <a:cs typeface="Times New Roman" panose="02020603050405020304" pitchFamily="18" charset="0"/>
+              </a:rPr>
+              <a:t>Предпросмотр темы перед покупкой</a:t>
+            </a:r>
+          </a:p>
+          <a:p>
+            <a:r>
+              <a:rPr lang="ru-RU" sz="2000" dirty="0">
+                <a:latin typeface="Times New Roman" panose="02020603050405020304" pitchFamily="18" charset="0"/>
+                <a:cs typeface="Times New Roman" panose="02020603050405020304" pitchFamily="18" charset="0"/>
+              </a:rPr>
+              <a:t>Мгновенное применение выбранной темы</a:t>
+            </a:r>
+          </a:p>
+          <a:p>
+            <a:pPr marL="0" indent="0">
+              <a:buNone/>
+            </a:pPr>
+            <a:endParaRPr lang="ru-RU" sz="2400" dirty="0">
               <a:latin typeface="Times New Roman" panose="02020603050405020304" pitchFamily="18" charset="0"/>
               <a:cs typeface="Times New Roman" panose="02020603050405020304" pitchFamily="18" charset="0"/>
             </a:endParaRPr>
           </a:p>
-          <a:p>
-            <a:endParaRPr lang="ru-RU" sz="2000" dirty="0">
+        </p:txBody>
+      </p:sp>
+      <p:pic>
+        <p:nvPicPr>
+          <p:cNvPr id="8" name="Рисунок 7" descr="Изображение выглядит как текст, снимок экрана, Шрифт, диаграмма&#10;&#10;Содержимое, созданное искусственным интеллектом, может быть неверным.">
+            <a:extLst>
+              <a:ext uri="{FF2B5EF4-FFF2-40B4-BE49-F238E27FC236}">
+                <a16:creationId xmlns:a16="http://schemas.microsoft.com/office/drawing/2014/main" id="{28E46ACF-DF72-06F0-86F9-E02EC0461A81}"/>
+              </a:ext>
+            </a:extLst>
+          </p:cNvPr>
+          <p:cNvPicPr>
+            <a:picLocks noChangeAspect="1"/>
+          </p:cNvPicPr>
+          <p:nvPr/>
+        </p:nvPicPr>
+        <p:blipFill>
+          <a:blip r:embed="rId2"/>
+          <a:stretch>
+            <a:fillRect/>
+          </a:stretch>
+        </p:blipFill>
+        <p:spPr>
+          <a:xfrm>
+            <a:off x="343270" y="3429000"/>
+            <a:ext cx="5976262" cy="2696460"/>
+          </a:xfrm>
+          <a:prstGeom prst="rect">
+            <a:avLst/>
+          </a:prstGeom>
+        </p:spPr>
+      </p:pic>
+      <p:pic>
+        <p:nvPicPr>
+          <p:cNvPr id="14" name="Рисунок 13" descr="Изображение выглядит как текст, снимок экрана, Шрифт&#10;&#10;Содержимое, созданное искусственным интеллектом, может быть неверным.">
+            <a:extLst>
+              <a:ext uri="{FF2B5EF4-FFF2-40B4-BE49-F238E27FC236}">
+                <a16:creationId xmlns:a16="http://schemas.microsoft.com/office/drawing/2014/main" id="{B0182F5F-3A7E-2E88-8778-3AB60BB8ADDB}"/>
+              </a:ext>
+            </a:extLst>
+          </p:cNvPr>
+          <p:cNvPicPr>
+            <a:picLocks noChangeAspect="1"/>
+          </p:cNvPicPr>
+          <p:nvPr/>
+        </p:nvPicPr>
+        <p:blipFill>
+          <a:blip r:embed="rId3"/>
+          <a:stretch>
+            <a:fillRect/>
+          </a:stretch>
+        </p:blipFill>
+        <p:spPr>
+          <a:xfrm>
+            <a:off x="6715124" y="3429000"/>
+            <a:ext cx="4943476" cy="2696460"/>
+          </a:xfrm>
+          <a:prstGeom prst="rect">
+            <a:avLst/>
+          </a:prstGeom>
+        </p:spPr>
+      </p:pic>
+    </p:spTree>
+    <p:extLst>
+      <p:ext uri="{BB962C8B-B14F-4D97-AF65-F5344CB8AC3E}">
+        <p14:creationId xmlns:p14="http://schemas.microsoft.com/office/powerpoint/2010/main" val="3510147550"/>
+      </p:ext>
+    </p:extLst>
+  </p:cSld>
+  <p:clrMapOvr>
+    <a:masterClrMapping/>
+  </p:clrMapOvr>
+</p:sld>
+</file>
+
+<file path=ppt/slides/slide9.xml><?xml version="1.0" encoding="utf-8"?>
+<p:sld xmlns:a="http://schemas.openxmlformats.org/drawingml/2006/main" xmlns:r="http://schemas.openxmlformats.org/officeDocument/2006/relationships" xmlns:p="http://schemas.openxmlformats.org/presentationml/2006/main">
+  <p:cSld>
+    <p:spTree>
+      <p:nvGrpSpPr>
+        <p:cNvPr id="1" name="">
+          <a:extLst>
+            <a:ext uri="{FF2B5EF4-FFF2-40B4-BE49-F238E27FC236}">
+              <a16:creationId xmlns:a16="http://schemas.microsoft.com/office/drawing/2014/main" id="{F6C023E7-7AED-07E7-340E-CB2EABBE926A}"/>
+            </a:ext>
+          </a:extLst>
+        </p:cNvPr>
+        <p:cNvGrpSpPr/>
+        <p:nvPr/>
+      </p:nvGrpSpPr>
+      <p:grpSpPr>
+        <a:xfrm>
+          <a:off x="0" y="0"/>
+          <a:ext cx="0" cy="0"/>
+          <a:chOff x="0" y="0"/>
+          <a:chExt cx="0" cy="0"/>
+        </a:xfrm>
+      </p:grpSpPr>
+      <p:sp>
+        <p:nvSpPr>
+          <p:cNvPr id="3" name="Объект 2">
+            <a:extLst>
+              <a:ext uri="{FF2B5EF4-FFF2-40B4-BE49-F238E27FC236}">
+                <a16:creationId xmlns:a16="http://schemas.microsoft.com/office/drawing/2014/main" id="{6BBADCDA-181C-0A7C-208E-C65CD19C2538}"/>
+              </a:ext>
+            </a:extLst>
+          </p:cNvPr>
+          <p:cNvSpPr>
+            <a:spLocks noGrp="1"/>
+          </p:cNvSpPr>
+          <p:nvPr>
+            <p:ph idx="1"/>
+          </p:nvPr>
+        </p:nvSpPr>
+        <p:spPr>
+          <a:xfrm>
+            <a:off x="343270" y="214874"/>
+            <a:ext cx="6371854" cy="2340746"/>
+          </a:xfrm>
+        </p:spPr>
+        <p:txBody>
+          <a:bodyPr>
+            <a:noAutofit/>
+          </a:bodyPr>
+          <a:lstStyle/>
+          <a:p>
+            <a:pPr marL="0" indent="0">
+              <a:buNone/>
+            </a:pPr>
+            <a:r>
+              <a:rPr lang="ru-RU" sz="2400" dirty="0">
+                <a:latin typeface="Times New Roman" panose="02020603050405020304" pitchFamily="18" charset="0"/>
+                <a:cs typeface="Times New Roman" panose="02020603050405020304" pitchFamily="18" charset="0"/>
+              </a:rPr>
+              <a:t>Детали матча:</a:t>
+            </a:r>
+          </a:p>
+          <a:p>
+            <a:r>
+              <a:rPr lang="ru-RU" sz="2000" dirty="0">
+                <a:latin typeface="Times New Roman" panose="02020603050405020304" pitchFamily="18" charset="0"/>
+                <a:cs typeface="Times New Roman" panose="02020603050405020304" pitchFamily="18" charset="0"/>
+              </a:rPr>
+              <a:t>Полная информация о матче (составы, статистика)</a:t>
+            </a:r>
+          </a:p>
+          <a:p>
+            <a:r>
+              <a:rPr lang="ru-RU" sz="2000" dirty="0">
+                <a:latin typeface="Times New Roman" panose="02020603050405020304" pitchFamily="18" charset="0"/>
+                <a:cs typeface="Times New Roman" panose="02020603050405020304" pitchFamily="18" charset="0"/>
+              </a:rPr>
+              <a:t>Интерактивная статистика (владение мячом, удары, фолы)</a:t>
+            </a:r>
+          </a:p>
+          <a:p>
+            <a:r>
+              <a:rPr lang="ru-RU" sz="2000" dirty="0">
+                <a:latin typeface="Times New Roman" panose="02020603050405020304" pitchFamily="18" charset="0"/>
+                <a:cs typeface="Times New Roman" panose="02020603050405020304" pitchFamily="18" charset="0"/>
+              </a:rPr>
+              <a:t>История формы команд (последние 5 матчей)</a:t>
+            </a:r>
+          </a:p>
+          <a:p>
+            <a:r>
+              <a:rPr lang="ru-RU" sz="2000" dirty="0">
+                <a:latin typeface="Times New Roman" panose="02020603050405020304" pitchFamily="18" charset="0"/>
+                <a:cs typeface="Times New Roman" panose="02020603050405020304" pitchFamily="18" charset="0"/>
+              </a:rPr>
+              <a:t>Чат для обсуждения матча с другими болельщиками</a:t>
+            </a:r>
+          </a:p>
+          <a:p>
+            <a:pPr marL="0" indent="0">
+              <a:buNone/>
+            </a:pPr>
+            <a:r>
+              <a:rPr lang="ru-RU" dirty="0"/>
+              <a:t/>
+            </a:r>
+            <a:br>
+              <a:rPr lang="ru-RU" dirty="0"/>
+            </a:br>
+            <a:endParaRPr lang="ru-RU" sz="2400" dirty="0">
               <a:latin typeface="Times New Roman" panose="02020603050405020304" pitchFamily="18" charset="0"/>
               <a:cs typeface="Times New Roman" panose="02020603050405020304" pitchFamily="18" charset="0"/>
             </a:endParaRPr>
           </a:p>
           <a:p>
-            <a:endParaRPr lang="ru-RU" dirty="0"/>
-          </a:p>
-        </p:txBody>
-      </p:sp>
+            <a:pPr marL="0" indent="0">
+              <a:buNone/>
+            </a:pPr>
+            <a:endParaRPr lang="ru-RU" sz="2400" dirty="0"/>
+          </a:p>
+        </p:txBody>
+      </p:sp>
+      <p:pic>
+        <p:nvPicPr>
+          <p:cNvPr id="4" name="Рисунок 3" descr="Изображение выглядит как текст, снимок экрана, число&#10;&#10;Содержимое, созданное искусственным интеллектом, может быть неверным.">
+            <a:extLst>
+              <a:ext uri="{FF2B5EF4-FFF2-40B4-BE49-F238E27FC236}">
+                <a16:creationId xmlns:a16="http://schemas.microsoft.com/office/drawing/2014/main" id="{79FEDA92-DD36-59AA-4A22-8AA6A7CAF421}"/>
+              </a:ext>
+            </a:extLst>
+          </p:cNvPr>
+          <p:cNvPicPr>
+            <a:picLocks noChangeAspect="1"/>
+          </p:cNvPicPr>
+          <p:nvPr/>
+        </p:nvPicPr>
+        <p:blipFill>
+          <a:blip r:embed="rId2"/>
+          <a:stretch>
+            <a:fillRect/>
+          </a:stretch>
+        </p:blipFill>
+        <p:spPr>
+          <a:xfrm>
+            <a:off x="7238849" y="214874"/>
+            <a:ext cx="4609881" cy="6419850"/>
+          </a:xfrm>
+          <a:prstGeom prst="rect">
+            <a:avLst/>
+          </a:prstGeom>
+        </p:spPr>
+      </p:pic>
+      <p:pic>
+        <p:nvPicPr>
+          <p:cNvPr id="6" name="Рисунок 5" descr="Изображение выглядит как текст, снимок экрана, дисплей, программное обеспечение&#10;&#10;Содержимое, созданное искусственным интеллектом, может быть неверным.">
+            <a:extLst>
+              <a:ext uri="{FF2B5EF4-FFF2-40B4-BE49-F238E27FC236}">
+                <a16:creationId xmlns:a16="http://schemas.microsoft.com/office/drawing/2014/main" id="{F8BF0325-E3DD-CA70-4BCF-49693F431E17}"/>
+              </a:ext>
+            </a:extLst>
+          </p:cNvPr>
+          <p:cNvPicPr>
+            <a:picLocks noChangeAspect="1"/>
+          </p:cNvPicPr>
+          <p:nvPr/>
+        </p:nvPicPr>
+        <p:blipFill>
+          <a:blip r:embed="rId3"/>
+          <a:stretch>
+            <a:fillRect/>
+          </a:stretch>
+        </p:blipFill>
+        <p:spPr>
+          <a:xfrm>
+            <a:off x="343270" y="3305175"/>
+            <a:ext cx="6432469" cy="3329549"/>
+          </a:xfrm>
+          <a:prstGeom prst="rect">
+            <a:avLst/>
+          </a:prstGeom>
+        </p:spPr>
+      </p:pic>
     </p:spTree>
     <p:extLst>
       <p:ext uri="{BB962C8B-B14F-4D97-AF65-F5344CB8AC3E}">
-        <p14:creationId xmlns:p14="http://schemas.microsoft.com/office/powerpoint/2010/main" val="3944365689"/>
+        <p14:creationId xmlns:p14="http://schemas.microsoft.com/office/powerpoint/2010/main" val="1900876394"/>
       </p:ext>
     </p:extLst>
   </p:cSld>
